--- a/reports/플랜두씨_다이어리_과제6_제출보고서.pptx
+++ b/reports/플랜두씨_다이어리_과제6_제출보고서.pptx
@@ -5,7 +5,7 @@
     <p:sldMasterId id="2147483648" r:id="rId1"/>
   </p:sldMasterIdLst>
   <p:notesMasterIdLst>
-    <p:notesMasterId r:id="rId20"/>
+    <p:notesMasterId r:id="rId27"/>
   </p:notesMasterIdLst>
   <p:sldIdLst>
     <p:sldId id="256" r:id="rId2"/>
@@ -25,7 +25,14 @@
     <p:sldId id="271" r:id="rId16"/>
     <p:sldId id="272" r:id="rId17"/>
     <p:sldId id="273" r:id="rId18"/>
-    <p:sldId id="270" r:id="rId19"/>
+    <p:sldId id="274" r:id="rId19"/>
+    <p:sldId id="275" r:id="rId20"/>
+    <p:sldId id="276" r:id="rId21"/>
+    <p:sldId id="277" r:id="rId22"/>
+    <p:sldId id="278" r:id="rId23"/>
+    <p:sldId id="279" r:id="rId24"/>
+    <p:sldId id="280" r:id="rId25"/>
+    <p:sldId id="270" r:id="rId26"/>
   </p:sldIdLst>
   <p:sldSz cx="12192000" cy="6858000"/>
   <p:notesSz cx="6858000" cy="12192000"/>
@@ -823,7 +830,7 @@
           <a:p>
             <a:fld id="{F7021451-1387-4CA6-816F-3879F97B5CBC}" type="slidenum">
               <a:rPr lang="en-US"/>
-              <a:t>18</a:t>
+              <a:t>25</a:t>
             </a:fld>
             <a:endParaRPr lang="en-US"/>
           </a:p>
@@ -2484,8 +2491,8 @@
           </a:lstStyle>
           <a:p>
             <a:r>
-              <a:rPr lang="en-US" altLang="ko-KR" dirty="0"/>
-              <a:t>https://github.com/stulss/plan-do-see-diary/commits/770e8f992d5f7da8c36b2dc823d3a5c29f5cdda6/</a:t>
+              <a:rPr lang="en-US" altLang="ko-KR"/>
+              <a:t>https://github.com/stulss/plan-do-see-diary/commits/61789c1819698c2ab946de2f702113b6438c5121/</a:t>
             </a:r>
             <a:endParaRPr lang="ko-KR" altLang="en-US" dirty="0"/>
           </a:p>
@@ -25164,11 +25171,11 @@
 
 <file path=ppt/slides/slide18.xml><?xml version="1.0" encoding="utf-8"?>
 <p:sld xmlns:a="http://schemas.openxmlformats.org/drawingml/2006/main" xmlns:r="http://schemas.openxmlformats.org/officeDocument/2006/relationships" xmlns:p="http://schemas.openxmlformats.org/presentationml/2006/main">
-  <p:cSld name="Slide 15">
+  <p:cSld>
     <p:bg>
       <p:bgPr>
         <a:solidFill>
-          <a:srgbClr val="17372F"/>
+          <a:srgbClr val="FCFCF8"/>
         </a:solidFill>
         <a:effectLst/>
       </p:bgPr>
@@ -25189,931 +25196,10 @@
       </p:grpSpPr>
       <p:sp>
         <p:nvSpPr>
-          <p:cNvPr id="2" name="Text 0"/>
-          <p:cNvSpPr/>
-          <p:nvPr/>
-        </p:nvSpPr>
-        <p:spPr>
-          <a:xfrm>
-            <a:off x="685800" y="566928"/>
-            <a:ext cx="3108960" cy="237744"/>
-          </a:xfrm>
-          <a:prstGeom prst="rect">
-            <a:avLst/>
-          </a:prstGeom>
-          <a:noFill/>
-          <a:ln/>
-        </p:spPr>
-        <p:txBody>
-          <a:bodyPr wrap="square" lIns="0" tIns="0" rIns="0" bIns="0" rtlCol="0" anchor="ctr">
-            <a:normAutofit/>
-          </a:bodyPr>
-          <a:lstStyle/>
-          <a:p>
-            <a:pPr marL="0" indent="0">
-              <a:buNone/>
-            </a:pPr>
-            <a:r>
-              <a:rPr lang="en-US" sz="1050" b="1" kern="0" spc="220" dirty="0">
-                <a:solidFill>
-                  <a:srgbClr val="EACB8E"/>
-                </a:solidFill>
-                <a:latin typeface="Malgun Gothic" pitchFamily="34" charset="0"/>
-                <a:ea typeface="Malgun Gothic" pitchFamily="34" charset="-122"/>
-                <a:cs typeface="Malgun Gothic" pitchFamily="34" charset="-120"/>
-              </a:rPr>
-              <a:t>READY TO SUBMIT</a:t>
-            </a:r>
-            <a:endParaRPr lang="en-US" sz="1050" dirty="0"/>
-          </a:p>
-        </p:txBody>
-      </p:sp>
-      <p:sp>
-        <p:nvSpPr>
-          <p:cNvPr id="3" name="Text 1"/>
-          <p:cNvSpPr/>
-          <p:nvPr/>
-        </p:nvSpPr>
-        <p:spPr>
-          <a:xfrm>
-            <a:off x="658368" y="1005840"/>
-            <a:ext cx="5486400" cy="1143000"/>
-          </a:xfrm>
-          <a:prstGeom prst="rect">
-            <a:avLst/>
-          </a:prstGeom>
-          <a:noFill/>
-          <a:ln/>
-        </p:spPr>
-        <p:txBody>
-          <a:bodyPr wrap="square" lIns="0" tIns="0" rIns="0" bIns="0" rtlCol="0" anchor="t">
-            <a:normAutofit/>
-          </a:bodyPr>
-          <a:lstStyle/>
-          <a:p>
-            <a:pPr marL="0" indent="0">
-              <a:buNone/>
-            </a:pPr>
-            <a:r>
-              <a:rPr lang="en-US" sz="3400" b="1" dirty="0">
-                <a:solidFill>
-                  <a:srgbClr val="FFFFFF"/>
-                </a:solidFill>
-                <a:latin typeface="Malgun Gothic" pitchFamily="34" charset="0"/>
-                <a:ea typeface="Malgun Gothic" pitchFamily="34" charset="-122"/>
-                <a:cs typeface="Malgun Gothic" pitchFamily="34" charset="-120"/>
-              </a:rPr>
-              <a:t>플랜두씨 다이어리</a:t>
-            </a:r>
-            <a:endParaRPr lang="en-US" sz="3400" dirty="0"/>
-          </a:p>
-          <a:p>
-            <a:pPr marL="0" indent="0">
-              <a:buNone/>
-            </a:pPr>
-            <a:r>
-              <a:rPr lang="en-US" sz="3400" b="1" dirty="0">
-                <a:solidFill>
-                  <a:srgbClr val="FFFFFF"/>
-                </a:solidFill>
-                <a:latin typeface="Malgun Gothic" pitchFamily="34" charset="0"/>
-                <a:ea typeface="Malgun Gothic" pitchFamily="34" charset="-122"/>
-                <a:cs typeface="Malgun Gothic" pitchFamily="34" charset="-120"/>
-              </a:rPr>
-              <a:t>제출 준비 완료</a:t>
-            </a:r>
-            <a:endParaRPr lang="en-US" sz="3400" dirty="0"/>
-          </a:p>
-        </p:txBody>
-      </p:sp>
-      <p:sp>
-        <p:nvSpPr>
-          <p:cNvPr id="4" name="Text 2"/>
-          <p:cNvSpPr/>
-          <p:nvPr/>
-        </p:nvSpPr>
-        <p:spPr>
-          <a:xfrm>
-            <a:off x="713232" y="2487168"/>
-            <a:ext cx="914400" cy="201168"/>
-          </a:xfrm>
-          <a:prstGeom prst="rect">
-            <a:avLst/>
-          </a:prstGeom>
-          <a:noFill/>
-          <a:ln/>
-        </p:spPr>
-        <p:txBody>
-          <a:bodyPr wrap="square" lIns="0" tIns="0" rIns="0" bIns="0" rtlCol="0" anchor="ctr">
-            <a:normAutofit/>
-          </a:bodyPr>
-          <a:lstStyle/>
-          <a:p>
-            <a:pPr marL="0" indent="0">
-              <a:buNone/>
-            </a:pPr>
-            <a:r>
-              <a:rPr lang="en-US" sz="950" b="1" dirty="0">
-                <a:solidFill>
-                  <a:srgbClr val="EACB8E"/>
-                </a:solidFill>
-                <a:latin typeface="Malgun Gothic" pitchFamily="34" charset="0"/>
-                <a:ea typeface="Malgun Gothic" pitchFamily="34" charset="-122"/>
-                <a:cs typeface="Malgun Gothic" pitchFamily="34" charset="-120"/>
-              </a:rPr>
-              <a:t>결과물</a:t>
-            </a:r>
-            <a:endParaRPr lang="en-US" sz="950" dirty="0"/>
-          </a:p>
-        </p:txBody>
-      </p:sp>
-      <p:sp>
-        <p:nvSpPr>
-          <p:cNvPr id="5" name="Text 3"/>
-          <p:cNvSpPr/>
-          <p:nvPr/>
-        </p:nvSpPr>
-        <p:spPr>
-          <a:xfrm>
-            <a:off x="713232" y="2724912"/>
-            <a:ext cx="5486400" cy="347472"/>
-          </a:xfrm>
-          <a:prstGeom prst="rect">
-            <a:avLst/>
-          </a:prstGeom>
-          <a:noFill/>
-          <a:ln/>
-        </p:spPr>
-        <p:txBody>
-          <a:bodyPr wrap="square" lIns="0" tIns="0" rIns="0" bIns="0" rtlCol="0" anchor="ctr">
-            <a:normAutofit/>
-          </a:bodyPr>
-          <a:lstStyle/>
-          <a:p>
-            <a:pPr marL="0" indent="0">
-              <a:buNone/>
-            </a:pPr>
-            <a:r>
-              <a:rPr lang="en-US" sz="1600" b="1" u="sng" dirty="0">
-                <a:solidFill>
-                  <a:srgbClr val="FFFFFF"/>
-                </a:solidFill>
-                <a:latin typeface="Malgun Gothic" pitchFamily="34" charset="0"/>
-                <a:ea typeface="Malgun Gothic" pitchFamily="34" charset="-122"/>
-                <a:cs typeface="Malgun Gothic" pitchFamily="34" charset="-120"/>
-                <a:hlinkClick r:id="rId3">
-                  <a:extLst>
-                    <a:ext uri="{A12FA001-AC4F-418D-AE19-62706E023703}">
-                      <ahyp:hlinkClr xmlns:ahyp="http://schemas.microsoft.com/office/drawing/2018/hyperlinkcolor" val="tx"/>
-                    </a:ext>
-                  </a:extLst>
-                </a:hlinkClick>
-              </a:rPr>
-              <a:t>https://plan-do-see-diary.vercel.app</a:t>
-            </a:r>
-            <a:endParaRPr lang="en-US" sz="1600" dirty="0"/>
-          </a:p>
-        </p:txBody>
-      </p:sp>
-      <p:sp>
-        <p:nvSpPr>
-          <p:cNvPr id="6" name="Text 4"/>
-          <p:cNvSpPr/>
-          <p:nvPr/>
-        </p:nvSpPr>
-        <p:spPr>
-          <a:xfrm>
-            <a:off x="713232" y="3273552"/>
-            <a:ext cx="914400" cy="201168"/>
-          </a:xfrm>
-          <a:prstGeom prst="rect">
-            <a:avLst/>
-          </a:prstGeom>
-          <a:noFill/>
-          <a:ln/>
-        </p:spPr>
-        <p:txBody>
-          <a:bodyPr wrap="square" lIns="0" tIns="0" rIns="0" bIns="0" rtlCol="0" anchor="ctr">
-            <a:normAutofit/>
-          </a:bodyPr>
-          <a:lstStyle/>
-          <a:p>
-            <a:pPr marL="0" indent="0">
-              <a:buNone/>
-            </a:pPr>
-            <a:r>
-              <a:rPr lang="en-US" sz="950" b="1" dirty="0">
-                <a:solidFill>
-                  <a:srgbClr val="EACB8E"/>
-                </a:solidFill>
-                <a:latin typeface="Malgun Gothic" pitchFamily="34" charset="0"/>
-                <a:ea typeface="Malgun Gothic" pitchFamily="34" charset="-122"/>
-                <a:cs typeface="Malgun Gothic" pitchFamily="34" charset="-120"/>
-              </a:rPr>
-              <a:t>GitHub</a:t>
-            </a:r>
-            <a:endParaRPr lang="en-US" sz="950" dirty="0"/>
-          </a:p>
-        </p:txBody>
-      </p:sp>
-      <p:sp>
-        <p:nvSpPr>
-          <p:cNvPr id="7" name="Text 5"/>
-          <p:cNvSpPr/>
-          <p:nvPr/>
-        </p:nvSpPr>
-        <p:spPr>
-          <a:xfrm>
-            <a:off x="713232" y="3511296"/>
-            <a:ext cx="5486400" cy="347472"/>
-          </a:xfrm>
-          <a:prstGeom prst="rect">
-            <a:avLst/>
-          </a:prstGeom>
-          <a:noFill/>
-          <a:ln/>
-        </p:spPr>
-        <p:txBody>
-          <a:bodyPr wrap="square" lIns="0" tIns="0" rIns="0" bIns="0" rtlCol="0" anchor="ctr">
-            <a:normAutofit/>
-          </a:bodyPr>
-          <a:lstStyle/>
-          <a:p>
-            <a:pPr marL="0" indent="0">
-              <a:buNone/>
-            </a:pPr>
-            <a:r>
-              <a:rPr lang="en-US" sz="1600" b="1" u="sng" dirty="0">
-                <a:solidFill>
-                  <a:srgbClr val="FFFFFF"/>
-                </a:solidFill>
-                <a:latin typeface="Malgun Gothic" pitchFamily="34" charset="0"/>
-                <a:ea typeface="Malgun Gothic" pitchFamily="34" charset="-122"/>
-                <a:cs typeface="Malgun Gothic" pitchFamily="34" charset="-120"/>
-                <a:hlinkClick r:id="rId4">
-                  <a:extLst>
-                    <a:ext uri="{A12FA001-AC4F-418D-AE19-62706E023703}">
-                      <ahyp:hlinkClr xmlns:ahyp="http://schemas.microsoft.com/office/drawing/2018/hyperlinkcolor" val="tx"/>
-                    </a:ext>
-                  </a:extLst>
-                </a:hlinkClick>
-              </a:rPr>
-              <a:t>github.com/stulss/plan-do-see-diary</a:t>
-            </a:r>
-            <a:endParaRPr lang="en-US" sz="1600" dirty="0"/>
-          </a:p>
-        </p:txBody>
-      </p:sp>
-      <p:sp>
-        <p:nvSpPr>
-          <p:cNvPr id="8" name="Text 6"/>
-          <p:cNvSpPr/>
-          <p:nvPr/>
-        </p:nvSpPr>
-        <p:spPr>
-          <a:xfrm>
-            <a:off x="713232" y="4059936"/>
-            <a:ext cx="1371600" cy="201168"/>
-          </a:xfrm>
-          <a:prstGeom prst="rect">
-            <a:avLst/>
-          </a:prstGeom>
-          <a:noFill/>
-          <a:ln/>
-        </p:spPr>
-        <p:txBody>
-          <a:bodyPr wrap="square" lIns="0" tIns="0" rIns="0" bIns="0" rtlCol="0" anchor="ctr">
-            <a:normAutofit/>
-          </a:bodyPr>
-          <a:lstStyle/>
-          <a:p>
-            <a:pPr marL="0" indent="0">
-              <a:buNone/>
-            </a:pPr>
-            <a:r>
-              <a:rPr lang="en-US" sz="950" b="1" dirty="0">
-                <a:solidFill>
-                  <a:srgbClr val="EACB8E"/>
-                </a:solidFill>
-                <a:latin typeface="Malgun Gothic" pitchFamily="34" charset="0"/>
-                <a:ea typeface="Malgun Gothic" pitchFamily="34" charset="-122"/>
-                <a:cs typeface="Malgun Gothic" pitchFamily="34" charset="-120"/>
-              </a:rPr>
-              <a:t>40자리 고정 소스</a:t>
-            </a:r>
-            <a:endParaRPr lang="en-US" sz="950" dirty="0"/>
-          </a:p>
-        </p:txBody>
-      </p:sp>
-      <p:sp>
-        <p:nvSpPr>
-          <p:cNvPr id="10" name="Shape 8"/>
-          <p:cNvSpPr/>
-          <p:nvPr/>
-        </p:nvSpPr>
-        <p:spPr>
-          <a:xfrm>
-            <a:off x="6629400" y="960120"/>
-            <a:ext cx="4800600" cy="4480560"/>
-          </a:xfrm>
-          <a:prstGeom prst="roundRect">
-            <a:avLst>
-              <a:gd name="adj" fmla="val 1633"/>
-            </a:avLst>
-          </a:prstGeom>
-          <a:solidFill>
-            <a:srgbClr val="23483E"/>
-          </a:solidFill>
-          <a:ln w="12700">
-            <a:solidFill>
-              <a:srgbClr val="315A4E"/>
-            </a:solidFill>
-            <a:prstDash val="solid"/>
-          </a:ln>
-        </p:spPr>
-      </p:sp>
-      <p:sp>
-        <p:nvSpPr>
-          <p:cNvPr id="11" name="Text 9"/>
-          <p:cNvSpPr/>
-          <p:nvPr/>
-        </p:nvSpPr>
-        <p:spPr>
-          <a:xfrm>
-            <a:off x="6967728" y="1298448"/>
-            <a:ext cx="1828800" cy="329184"/>
-          </a:xfrm>
-          <a:prstGeom prst="rect">
-            <a:avLst/>
-          </a:prstGeom>
-          <a:noFill/>
-          <a:ln/>
-        </p:spPr>
-        <p:txBody>
-          <a:bodyPr wrap="square" lIns="0" tIns="0" rIns="0" bIns="0" rtlCol="0" anchor="ctr">
-            <a:normAutofit/>
-          </a:bodyPr>
-          <a:lstStyle/>
-          <a:p>
-            <a:pPr marL="0" indent="0">
-              <a:buNone/>
-            </a:pPr>
-            <a:r>
-              <a:rPr lang="en-US" sz="2100" b="1" dirty="0">
-                <a:solidFill>
-                  <a:srgbClr val="FFFFFF"/>
-                </a:solidFill>
-                <a:latin typeface="Malgun Gothic" pitchFamily="34" charset="0"/>
-                <a:ea typeface="Malgun Gothic" pitchFamily="34" charset="-122"/>
-                <a:cs typeface="Malgun Gothic" pitchFamily="34" charset="-120"/>
-              </a:rPr>
-              <a:t>30초 확인</a:t>
-            </a:r>
-            <a:endParaRPr lang="en-US" sz="2100" dirty="0"/>
-          </a:p>
-        </p:txBody>
-      </p:sp>
-      <p:sp>
-        <p:nvSpPr>
-          <p:cNvPr id="12" name="Shape 10"/>
-          <p:cNvSpPr/>
-          <p:nvPr/>
-        </p:nvSpPr>
-        <p:spPr>
-          <a:xfrm>
-            <a:off x="6967728" y="1874520"/>
-            <a:ext cx="411480" cy="411480"/>
-          </a:xfrm>
-          <a:prstGeom prst="ellipse">
-            <a:avLst/>
-          </a:prstGeom>
-          <a:solidFill>
-            <a:srgbClr val="146B58"/>
-          </a:solidFill>
-          <a:ln w="12700">
-            <a:solidFill>
-              <a:srgbClr val="146B58"/>
-            </a:solidFill>
-            <a:prstDash val="solid"/>
-          </a:ln>
-        </p:spPr>
-      </p:sp>
-      <p:sp>
-        <p:nvSpPr>
-          <p:cNvPr id="13" name="Text 11"/>
-          <p:cNvSpPr/>
-          <p:nvPr/>
-        </p:nvSpPr>
-        <p:spPr>
-          <a:xfrm>
-            <a:off x="6967728" y="1892808"/>
-            <a:ext cx="411480" cy="347472"/>
-          </a:xfrm>
-          <a:prstGeom prst="rect">
-            <a:avLst/>
-          </a:prstGeom>
-          <a:noFill/>
-          <a:ln/>
-        </p:spPr>
-        <p:txBody>
-          <a:bodyPr wrap="square" lIns="0" tIns="0" rIns="0" bIns="0" rtlCol="0" anchor="ctr">
-            <a:normAutofit/>
-          </a:bodyPr>
-          <a:lstStyle/>
-          <a:p>
-            <a:pPr marL="0" indent="0" algn="ctr">
-              <a:buNone/>
-            </a:pPr>
-            <a:r>
-              <a:rPr lang="en-US" sz="1100" b="1" dirty="0">
-                <a:solidFill>
-                  <a:srgbClr val="FFFFFF"/>
-                </a:solidFill>
-                <a:latin typeface="Malgun Gothic" pitchFamily="34" charset="0"/>
-                <a:ea typeface="Malgun Gothic" pitchFamily="34" charset="-122"/>
-                <a:cs typeface="Malgun Gothic" pitchFamily="34" charset="-120"/>
-              </a:rPr>
-              <a:t>1</a:t>
-            </a:r>
-            <a:endParaRPr lang="en-US" sz="1100" dirty="0"/>
-          </a:p>
-        </p:txBody>
-      </p:sp>
-      <p:sp>
-        <p:nvSpPr>
-          <p:cNvPr id="14" name="Text 12"/>
-          <p:cNvSpPr/>
-          <p:nvPr/>
-        </p:nvSpPr>
-        <p:spPr>
-          <a:xfrm>
-            <a:off x="7571232" y="1874520"/>
-            <a:ext cx="3456432" cy="420624"/>
-          </a:xfrm>
-          <a:prstGeom prst="rect">
-            <a:avLst/>
-          </a:prstGeom>
-          <a:noFill/>
-          <a:ln/>
-        </p:spPr>
-        <p:txBody>
-          <a:bodyPr wrap="square" lIns="0" tIns="0" rIns="0" bIns="0" rtlCol="0" anchor="ctr">
-            <a:normAutofit/>
-          </a:bodyPr>
-          <a:lstStyle/>
-          <a:p>
-            <a:pPr marL="0" indent="0">
-              <a:buNone/>
-            </a:pPr>
-            <a:r>
-              <a:rPr lang="en-US" sz="1300" dirty="0">
-                <a:solidFill>
-                  <a:srgbClr val="E3F0EB"/>
-                </a:solidFill>
-                <a:latin typeface="Malgun Gothic" pitchFamily="34" charset="0"/>
-                <a:ea typeface="Malgun Gothic" pitchFamily="34" charset="-122"/>
-                <a:cs typeface="Malgun Gothic" pitchFamily="34" charset="-120"/>
-              </a:rPr>
-              <a:t>결과물 주소를 로그인 없이 연다</a:t>
-            </a:r>
-            <a:endParaRPr lang="en-US" sz="1300" dirty="0"/>
-          </a:p>
-        </p:txBody>
-      </p:sp>
-      <p:sp>
-        <p:nvSpPr>
-          <p:cNvPr id="15" name="Shape 13"/>
-          <p:cNvSpPr/>
-          <p:nvPr/>
-        </p:nvSpPr>
-        <p:spPr>
-          <a:xfrm>
-            <a:off x="6967728" y="2624328"/>
-            <a:ext cx="411480" cy="411480"/>
-          </a:xfrm>
-          <a:prstGeom prst="ellipse">
-            <a:avLst/>
-          </a:prstGeom>
-          <a:solidFill>
-            <a:srgbClr val="146B58"/>
-          </a:solidFill>
-          <a:ln w="12700">
-            <a:solidFill>
-              <a:srgbClr val="146B58"/>
-            </a:solidFill>
-            <a:prstDash val="solid"/>
-          </a:ln>
-        </p:spPr>
-      </p:sp>
-      <p:sp>
-        <p:nvSpPr>
-          <p:cNvPr id="16" name="Text 14"/>
-          <p:cNvSpPr/>
-          <p:nvPr/>
-        </p:nvSpPr>
-        <p:spPr>
-          <a:xfrm>
-            <a:off x="6967728" y="2642616"/>
-            <a:ext cx="411480" cy="347472"/>
-          </a:xfrm>
-          <a:prstGeom prst="rect">
-            <a:avLst/>
-          </a:prstGeom>
-          <a:noFill/>
-          <a:ln/>
-        </p:spPr>
-        <p:txBody>
-          <a:bodyPr wrap="square" lIns="0" tIns="0" rIns="0" bIns="0" rtlCol="0" anchor="ctr">
-            <a:normAutofit/>
-          </a:bodyPr>
-          <a:lstStyle/>
-          <a:p>
-            <a:pPr marL="0" indent="0" algn="ctr">
-              <a:buNone/>
-            </a:pPr>
-            <a:r>
-              <a:rPr lang="en-US" sz="1100" b="1" dirty="0">
-                <a:solidFill>
-                  <a:srgbClr val="FFFFFF"/>
-                </a:solidFill>
-                <a:latin typeface="Malgun Gothic" pitchFamily="34" charset="0"/>
-                <a:ea typeface="Malgun Gothic" pitchFamily="34" charset="-122"/>
-                <a:cs typeface="Malgun Gothic" pitchFamily="34" charset="-120"/>
-              </a:rPr>
-              <a:t>2</a:t>
-            </a:r>
-            <a:endParaRPr lang="en-US" sz="1100" dirty="0"/>
-          </a:p>
-        </p:txBody>
-      </p:sp>
-      <p:sp>
-        <p:nvSpPr>
-          <p:cNvPr id="17" name="Text 15"/>
-          <p:cNvSpPr/>
-          <p:nvPr/>
-        </p:nvSpPr>
-        <p:spPr>
-          <a:xfrm>
-            <a:off x="7571232" y="2624328"/>
-            <a:ext cx="3456432" cy="420624"/>
-          </a:xfrm>
-          <a:prstGeom prst="rect">
-            <a:avLst/>
-          </a:prstGeom>
-          <a:noFill/>
-          <a:ln/>
-        </p:spPr>
-        <p:txBody>
-          <a:bodyPr wrap="square" lIns="0" tIns="0" rIns="0" bIns="0" rtlCol="0" anchor="ctr">
-            <a:normAutofit/>
-          </a:bodyPr>
-          <a:lstStyle/>
-          <a:p>
-            <a:pPr marL="0" indent="0">
-              <a:buNone/>
-            </a:pPr>
-            <a:r>
-              <a:rPr lang="en-US" sz="1300" dirty="0">
-                <a:solidFill>
-                  <a:srgbClr val="E3F0EB"/>
-                </a:solidFill>
-                <a:latin typeface="Malgun Gothic" pitchFamily="34" charset="0"/>
-                <a:ea typeface="Malgun Gothic" pitchFamily="34" charset="-122"/>
-                <a:cs typeface="Malgun Gothic" pitchFamily="34" charset="-120"/>
-              </a:rPr>
-              <a:t>완료 버튼을 연속으로 누른다</a:t>
-            </a:r>
-            <a:endParaRPr lang="en-US" sz="1300" dirty="0"/>
-          </a:p>
-        </p:txBody>
-      </p:sp>
-      <p:sp>
-        <p:nvSpPr>
-          <p:cNvPr id="18" name="Shape 16"/>
-          <p:cNvSpPr/>
-          <p:nvPr/>
-        </p:nvSpPr>
-        <p:spPr>
-          <a:xfrm>
-            <a:off x="6967728" y="3374136"/>
-            <a:ext cx="411480" cy="411480"/>
-          </a:xfrm>
-          <a:prstGeom prst="ellipse">
-            <a:avLst/>
-          </a:prstGeom>
-          <a:solidFill>
-            <a:srgbClr val="146B58"/>
-          </a:solidFill>
-          <a:ln w="12700">
-            <a:solidFill>
-              <a:srgbClr val="146B58"/>
-            </a:solidFill>
-            <a:prstDash val="solid"/>
-          </a:ln>
-        </p:spPr>
-      </p:sp>
-      <p:sp>
-        <p:nvSpPr>
-          <p:cNvPr id="19" name="Text 17"/>
-          <p:cNvSpPr/>
-          <p:nvPr/>
-        </p:nvSpPr>
-        <p:spPr>
-          <a:xfrm>
-            <a:off x="6967728" y="3392424"/>
-            <a:ext cx="411480" cy="347472"/>
-          </a:xfrm>
-          <a:prstGeom prst="rect">
-            <a:avLst/>
-          </a:prstGeom>
-          <a:noFill/>
-          <a:ln/>
-        </p:spPr>
-        <p:txBody>
-          <a:bodyPr wrap="square" lIns="0" tIns="0" rIns="0" bIns="0" rtlCol="0" anchor="ctr">
-            <a:normAutofit/>
-          </a:bodyPr>
-          <a:lstStyle/>
-          <a:p>
-            <a:pPr marL="0" indent="0" algn="ctr">
-              <a:buNone/>
-            </a:pPr>
-            <a:r>
-              <a:rPr lang="en-US" sz="1100" b="1" dirty="0">
-                <a:solidFill>
-                  <a:srgbClr val="FFFFFF"/>
-                </a:solidFill>
-                <a:latin typeface="Malgun Gothic" pitchFamily="34" charset="0"/>
-                <a:ea typeface="Malgun Gothic" pitchFamily="34" charset="-122"/>
-                <a:cs typeface="Malgun Gothic" pitchFamily="34" charset="-120"/>
-              </a:rPr>
-              <a:t>3</a:t>
-            </a:r>
-            <a:endParaRPr lang="en-US" sz="1100" dirty="0"/>
-          </a:p>
-        </p:txBody>
-      </p:sp>
-      <p:sp>
-        <p:nvSpPr>
-          <p:cNvPr id="20" name="Text 18"/>
-          <p:cNvSpPr/>
-          <p:nvPr/>
-        </p:nvSpPr>
-        <p:spPr>
-          <a:xfrm>
-            <a:off x="7571232" y="3374136"/>
-            <a:ext cx="3456432" cy="420624"/>
-          </a:xfrm>
-          <a:prstGeom prst="rect">
-            <a:avLst/>
-          </a:prstGeom>
-          <a:noFill/>
-          <a:ln/>
-        </p:spPr>
-        <p:txBody>
-          <a:bodyPr wrap="square" lIns="0" tIns="0" rIns="0" bIns="0" rtlCol="0" anchor="ctr">
-            <a:normAutofit/>
-          </a:bodyPr>
-          <a:lstStyle/>
-          <a:p>
-            <a:pPr marL="0" indent="0">
-              <a:buNone/>
-            </a:pPr>
-            <a:r>
-              <a:rPr lang="en-US" sz="1300" dirty="0">
-                <a:solidFill>
-                  <a:srgbClr val="E3F0EB"/>
-                </a:solidFill>
-                <a:latin typeface="Malgun Gothic" pitchFamily="34" charset="0"/>
-                <a:ea typeface="Malgun Gothic" pitchFamily="34" charset="-122"/>
-                <a:cs typeface="Malgun Gothic" pitchFamily="34" charset="-120"/>
-              </a:rPr>
-              <a:t>돌아보기의 완료 수를 클릭한다</a:t>
-            </a:r>
-            <a:endParaRPr lang="en-US" sz="1300" dirty="0"/>
-          </a:p>
-        </p:txBody>
-      </p:sp>
-      <p:sp>
-        <p:nvSpPr>
-          <p:cNvPr id="21" name="Shape 19"/>
-          <p:cNvSpPr/>
-          <p:nvPr/>
-        </p:nvSpPr>
-        <p:spPr>
-          <a:xfrm>
-            <a:off x="6967728" y="4123944"/>
-            <a:ext cx="411480" cy="411480"/>
-          </a:xfrm>
-          <a:prstGeom prst="ellipse">
-            <a:avLst/>
-          </a:prstGeom>
-          <a:solidFill>
-            <a:srgbClr val="C58B2A"/>
-          </a:solidFill>
-          <a:ln w="12700">
-            <a:solidFill>
-              <a:srgbClr val="C58B2A"/>
-            </a:solidFill>
-            <a:prstDash val="solid"/>
-          </a:ln>
-        </p:spPr>
-      </p:sp>
-      <p:sp>
-        <p:nvSpPr>
-          <p:cNvPr id="22" name="Text 20"/>
-          <p:cNvSpPr/>
-          <p:nvPr/>
-        </p:nvSpPr>
-        <p:spPr>
-          <a:xfrm>
-            <a:off x="6967728" y="4142232"/>
-            <a:ext cx="411480" cy="347472"/>
-          </a:xfrm>
-          <a:prstGeom prst="rect">
-            <a:avLst/>
-          </a:prstGeom>
-          <a:noFill/>
-          <a:ln/>
-        </p:spPr>
-        <p:txBody>
-          <a:bodyPr wrap="square" lIns="0" tIns="0" rIns="0" bIns="0" rtlCol="0" anchor="ctr">
-            <a:normAutofit/>
-          </a:bodyPr>
-          <a:lstStyle/>
-          <a:p>
-            <a:pPr marL="0" indent="0" algn="ctr">
-              <a:buNone/>
-            </a:pPr>
-            <a:r>
-              <a:rPr lang="en-US" sz="1100" b="1" dirty="0">
-                <a:solidFill>
-                  <a:srgbClr val="FFFFFF"/>
-                </a:solidFill>
-                <a:latin typeface="Malgun Gothic" pitchFamily="34" charset="0"/>
-                <a:ea typeface="Malgun Gothic" pitchFamily="34" charset="-122"/>
-                <a:cs typeface="Malgun Gothic" pitchFamily="34" charset="-120"/>
-              </a:rPr>
-              <a:t>✓</a:t>
-            </a:r>
-            <a:endParaRPr lang="en-US" sz="1100" dirty="0"/>
-          </a:p>
-        </p:txBody>
-      </p:sp>
-      <p:sp>
-        <p:nvSpPr>
-          <p:cNvPr id="23" name="Text 21"/>
-          <p:cNvSpPr/>
-          <p:nvPr/>
-        </p:nvSpPr>
-        <p:spPr>
-          <a:xfrm>
-            <a:off x="7571232" y="4123944"/>
-            <a:ext cx="3456432" cy="420624"/>
-          </a:xfrm>
-          <a:prstGeom prst="rect">
-            <a:avLst/>
-          </a:prstGeom>
-          <a:noFill/>
-          <a:ln/>
-        </p:spPr>
-        <p:txBody>
-          <a:bodyPr wrap="square" lIns="0" tIns="0" rIns="0" bIns="0" rtlCol="0" anchor="ctr">
-            <a:normAutofit/>
-          </a:bodyPr>
-          <a:lstStyle/>
-          <a:p>
-            <a:pPr marL="0" indent="0">
-              <a:buNone/>
-            </a:pPr>
-            <a:r>
-              <a:rPr lang="en-US" sz="1300" b="1" dirty="0">
-                <a:solidFill>
-                  <a:srgbClr val="F4D69A"/>
-                </a:solidFill>
-                <a:latin typeface="Malgun Gothic" pitchFamily="34" charset="0"/>
-                <a:ea typeface="Malgun Gothic" pitchFamily="34" charset="-122"/>
-                <a:cs typeface="Malgun Gothic" pitchFamily="34" charset="-120"/>
-              </a:rPr>
-              <a:t>완료 +1, 근거 목록 건수 일치</a:t>
-            </a:r>
-            <a:endParaRPr lang="en-US" sz="1300" dirty="0"/>
-          </a:p>
-        </p:txBody>
-      </p:sp>
-      <p:sp>
-        <p:nvSpPr>
-          <p:cNvPr id="24" name="Shape 22"/>
-          <p:cNvSpPr/>
-          <p:nvPr/>
-        </p:nvSpPr>
-        <p:spPr>
-          <a:xfrm>
-            <a:off x="6995160" y="4892040"/>
-            <a:ext cx="1965960" cy="310896"/>
-          </a:xfrm>
-          <a:prstGeom prst="roundRect">
-            <a:avLst/>
-          </a:prstGeom>
-          <a:solidFill>
-            <a:srgbClr val="C58B2A"/>
-          </a:solidFill>
-          <a:ln w="12700">
-            <a:solidFill>
-              <a:srgbClr val="C58B2A"/>
-            </a:solidFill>
-            <a:prstDash val="solid"/>
-          </a:ln>
-        </p:spPr>
-      </p:sp>
-      <p:sp>
-        <p:nvSpPr>
-          <p:cNvPr id="25" name="Text 23"/>
-          <p:cNvSpPr/>
-          <p:nvPr/>
-        </p:nvSpPr>
-        <p:spPr>
-          <a:xfrm>
-            <a:off x="6995160" y="4905756"/>
-            <a:ext cx="1965960" cy="274320"/>
-          </a:xfrm>
-          <a:prstGeom prst="rect">
-            <a:avLst/>
-          </a:prstGeom>
-          <a:noFill/>
-          <a:ln/>
-        </p:spPr>
-        <p:txBody>
-          <a:bodyPr wrap="square" lIns="0" tIns="0" rIns="0" bIns="0" rtlCol="0" anchor="ctr">
-            <a:normAutofit/>
-          </a:bodyPr>
-          <a:lstStyle/>
-          <a:p>
-            <a:pPr marL="0" indent="0" algn="ctr">
-              <a:buNone/>
-            </a:pPr>
-            <a:r>
-              <a:rPr lang="en-US" sz="1050" b="1" dirty="0">
-                <a:solidFill>
-                  <a:srgbClr val="FFFFFF"/>
-                </a:solidFill>
-                <a:latin typeface="Malgun Gothic" pitchFamily="34" charset="0"/>
-                <a:ea typeface="Malgun Gothic" pitchFamily="34" charset="-122"/>
-                <a:cs typeface="Malgun Gothic" pitchFamily="34" charset="-120"/>
-              </a:rPr>
-              <a:t>P0–P7 COMPLETE</a:t>
-            </a:r>
-            <a:endParaRPr lang="en-US" sz="1050" dirty="0"/>
-          </a:p>
-        </p:txBody>
-      </p:sp>
-      <p:sp>
-        <p:nvSpPr>
-          <p:cNvPr id="26" name="Text 24"/>
-          <p:cNvSpPr/>
-          <p:nvPr/>
-        </p:nvSpPr>
-        <p:spPr>
-          <a:xfrm>
-            <a:off x="713232" y="6035040"/>
-            <a:ext cx="5394960" cy="292608"/>
-          </a:xfrm>
-          <a:prstGeom prst="rect">
-            <a:avLst/>
-          </a:prstGeom>
-          <a:noFill/>
-          <a:ln/>
-        </p:spPr>
-        <p:txBody>
-          <a:bodyPr wrap="square" lIns="0" tIns="0" rIns="0" bIns="0" rtlCol="0" anchor="ctr">
-            <a:normAutofit/>
-          </a:bodyPr>
-          <a:lstStyle/>
-          <a:p>
-            <a:pPr marL="0" indent="0">
-              <a:buNone/>
-            </a:pPr>
-            <a:r>
-              <a:rPr lang="en-US" sz="1600" b="1" dirty="0">
-                <a:solidFill>
-                  <a:srgbClr val="AAC6BD"/>
-                </a:solidFill>
-                <a:latin typeface="Malgun Gothic" pitchFamily="34" charset="0"/>
-                <a:ea typeface="Malgun Gothic" pitchFamily="34" charset="-122"/>
-                <a:cs typeface="Malgun Gothic" pitchFamily="34" charset="-120"/>
-              </a:rPr>
-              <a:t>Plan → Do → See → Next Plan</a:t>
-            </a:r>
-            <a:endParaRPr lang="en-US" sz="1600" dirty="0"/>
-          </a:p>
-        </p:txBody>
-      </p:sp>
-      <p:sp>
-        <p:nvSpPr>
-          <p:cNvPr id="28" name="TextBox 27">
+          <p:cNvPr id="2" name="TextBox 1">
             <a:extLst>
               <a:ext uri="{FF2B5EF4-FFF2-40B4-BE49-F238E27FC236}">
-                <a16:creationId xmlns:a16="http://schemas.microsoft.com/office/drawing/2014/main" id="{BC773165-256B-4BCF-8395-365A017A4CE3}"/>
+                <a16:creationId xmlns:a16="http://schemas.microsoft.com/office/drawing/2014/main" id="{C484AB6A-DD48-4ECF-9FA0-FC1B27E0CBC6}"/>
               </a:ext>
             </a:extLst>
           </p:cNvPr>
@@ -26122,42 +25208,692 @@
         </p:nvSpPr>
         <p:spPr>
           <a:xfrm>
-            <a:off x="713232" y="4320571"/>
-            <a:ext cx="6097022" cy="507831"/>
-          </a:xfrm>
-          <a:prstGeom prst="rect">
-            <a:avLst/>
-          </a:prstGeom>
-          <a:noFill/>
-          <a:ln/>
-        </p:spPr>
-        <p:txBody>
-          <a:bodyPr wrap="square" lIns="0" tIns="0" rIns="0" bIns="0" rtlCol="0" anchor="ctr">
-            <a:normAutofit/>
-          </a:bodyPr>
-          <a:lstStyle>
-            <a:lvl1pPr indent="0">
-              <a:buNone/>
-              <a:defRPr sz="1350" b="1" u="sng">
-                <a:solidFill>
-                  <a:srgbClr val="FFFFFF"/>
-                </a:solidFill>
-                <a:latin typeface="Malgun Gothic" pitchFamily="34" charset="0"/>
-                <a:ea typeface="Malgun Gothic" pitchFamily="34" charset="-122"/>
-                <a:cs typeface="Malgun Gothic" pitchFamily="34" charset="-120"/>
-              </a:defRPr>
-            </a:lvl1pPr>
-          </a:lstStyle>
-          <a:p>
-            <a:r>
-              <a:rPr lang="en-US" altLang="ko-KR" dirty="0"/>
-              <a:t>https://github.com/stulss/plan-do-see-diary/commits/770e8f992d5f7da8c36b2dc823d3a5c29f5cdda6/</a:t>
-            </a:r>
-            <a:endParaRPr lang="ko-KR" altLang="en-US" dirty="0"/>
-          </a:p>
-        </p:txBody>
-      </p:sp>
+            <a:off x="594360" y="347472"/>
+            <a:ext cx="3657600" cy="169277"/>
+          </a:xfrm>
+          <a:prstGeom prst="rect">
+            <a:avLst/>
+          </a:prstGeom>
+          <a:noFill/>
+        </p:spPr>
+        <p:txBody>
+          <a:bodyPr vert="horz" wrap="square" lIns="0" tIns="0" rIns="0" bIns="0" rtlCol="0">
+            <a:spAutoFit/>
+          </a:bodyPr>
+          <a:lstStyle/>
+          <a:p>
+            <a:r>
+              <a:rPr lang="en-US" altLang="ko-KR" sz="1100" b="1">
+                <a:solidFill>
+                  <a:srgbClr val="146B58"/>
+                </a:solidFill>
+                <a:latin typeface="맑은 고딕" panose="020B0503020000020004" pitchFamily="50" charset="-127"/>
+              </a:rPr>
+              <a:t>PC </a:t>
+            </a:r>
+            <a:r>
+              <a:rPr lang="ko-KR" altLang="en-US" sz="1100" b="1">
+                <a:solidFill>
+                  <a:srgbClr val="146B58"/>
+                </a:solidFill>
+                <a:latin typeface="맑은 고딕" panose="020B0503020000020004" pitchFamily="50" charset="-127"/>
+              </a:rPr>
+              <a:t>증거 </a:t>
+            </a:r>
+            <a:r>
+              <a:rPr lang="en-US" altLang="ko-KR" sz="1100" b="1">
+                <a:solidFill>
+                  <a:srgbClr val="146B58"/>
+                </a:solidFill>
+                <a:latin typeface="맑은 고딕" panose="020B0503020000020004" pitchFamily="50" charset="-127"/>
+              </a:rPr>
+              <a:t>1/7 · C04~C08</a:t>
+            </a:r>
+            <a:endParaRPr lang="ko-KR" altLang="en-US" sz="1100" b="1">
+              <a:solidFill>
+                <a:srgbClr val="146B58"/>
+              </a:solidFill>
+              <a:latin typeface="맑은 고딕" panose="020B0503020000020004" pitchFamily="50" charset="-127"/>
+            </a:endParaRPr>
+          </a:p>
+        </p:txBody>
+      </p:sp>
+      <p:sp>
+        <p:nvSpPr>
+          <p:cNvPr id="3" name="TextBox 2">
+            <a:extLst>
+              <a:ext uri="{FF2B5EF4-FFF2-40B4-BE49-F238E27FC236}">
+                <a16:creationId xmlns:a16="http://schemas.microsoft.com/office/drawing/2014/main" id="{6EB76358-3EEA-4E9F-8513-F457786A3428}"/>
+              </a:ext>
+            </a:extLst>
+          </p:cNvPr>
+          <p:cNvSpPr txBox="1"/>
+          <p:nvPr/>
+        </p:nvSpPr>
+        <p:spPr>
+          <a:xfrm>
+            <a:off x="594360" y="658368"/>
+            <a:ext cx="8046720" cy="384721"/>
+          </a:xfrm>
+          <a:prstGeom prst="rect">
+            <a:avLst/>
+          </a:prstGeom>
+          <a:noFill/>
+        </p:spPr>
+        <p:txBody>
+          <a:bodyPr vert="horz" wrap="square" lIns="0" tIns="0" rIns="0" bIns="0" rtlCol="0">
+            <a:spAutoFit/>
+          </a:bodyPr>
+          <a:lstStyle/>
+          <a:p>
+            <a:r>
+              <a:rPr lang="ko-KR" altLang="en-US" sz="2500" b="1">
+                <a:solidFill>
+                  <a:srgbClr val="17372F"/>
+                </a:solidFill>
+                <a:latin typeface="맑은 고딕" panose="020B0503020000020004" pitchFamily="50" charset="-127"/>
+              </a:rPr>
+              <a:t>계획과 수정 이력</a:t>
+            </a:r>
+          </a:p>
+        </p:txBody>
+      </p:sp>
+      <p:sp>
+        <p:nvSpPr>
+          <p:cNvPr id="4" name="TextBox 3">
+            <a:extLst>
+              <a:ext uri="{FF2B5EF4-FFF2-40B4-BE49-F238E27FC236}">
+                <a16:creationId xmlns:a16="http://schemas.microsoft.com/office/drawing/2014/main" id="{5197D8A0-1218-49BB-BF89-D89A4B41344E}"/>
+              </a:ext>
+            </a:extLst>
+          </p:cNvPr>
+          <p:cNvSpPr txBox="1"/>
+          <p:nvPr/>
+        </p:nvSpPr>
+        <p:spPr>
+          <a:xfrm>
+            <a:off x="594360" y="1078992"/>
+            <a:ext cx="10789920" cy="169277"/>
+          </a:xfrm>
+          <a:prstGeom prst="rect">
+            <a:avLst/>
+          </a:prstGeom>
+          <a:noFill/>
+        </p:spPr>
+        <p:txBody>
+          <a:bodyPr vert="horz" wrap="square" lIns="0" tIns="0" rIns="0" bIns="0" rtlCol="0">
+            <a:spAutoFit/>
+          </a:bodyPr>
+          <a:lstStyle/>
+          <a:p>
+            <a:r>
+              <a:rPr lang="ko-KR" altLang="en-US" sz="1100">
+                <a:solidFill>
+                  <a:srgbClr val="5F6F69"/>
+                </a:solidFill>
+                <a:latin typeface="맑은 고딕" panose="020B0503020000020004" pitchFamily="50" charset="-127"/>
+              </a:rPr>
+              <a:t>기간</a:t>
+            </a:r>
+            <a:r>
+              <a:rPr lang="en-US" altLang="ko-KR" sz="1100">
+                <a:solidFill>
+                  <a:srgbClr val="5F6F69"/>
+                </a:solidFill>
+                <a:latin typeface="맑은 고딕" panose="020B0503020000020004" pitchFamily="50" charset="-127"/>
+              </a:rPr>
+              <a:t>·</a:t>
+            </a:r>
+            <a:r>
+              <a:rPr lang="ko-KR" altLang="en-US" sz="1100">
+                <a:solidFill>
+                  <a:srgbClr val="5F6F69"/>
+                </a:solidFill>
+                <a:latin typeface="맑은 고딕" panose="020B0503020000020004" pitchFamily="50" charset="-127"/>
+              </a:rPr>
+              <a:t>우선순위</a:t>
+            </a:r>
+            <a:r>
+              <a:rPr lang="en-US" altLang="ko-KR" sz="1100">
+                <a:solidFill>
+                  <a:srgbClr val="5F6F69"/>
+                </a:solidFill>
+                <a:latin typeface="맑은 고딕" panose="020B0503020000020004" pitchFamily="50" charset="-127"/>
+              </a:rPr>
+              <a:t>·</a:t>
+            </a:r>
+            <a:r>
+              <a:rPr lang="ko-KR" altLang="en-US" sz="1100">
+                <a:solidFill>
+                  <a:srgbClr val="5F6F69"/>
+                </a:solidFill>
+                <a:latin typeface="맑은 고딕" panose="020B0503020000020004" pitchFamily="50" charset="-127"/>
+              </a:rPr>
+              <a:t>예상 시간과 </a:t>
+            </a:r>
+            <a:r>
+              <a:rPr lang="en-US" altLang="ko-KR" sz="1100">
+                <a:solidFill>
+                  <a:srgbClr val="5F6F69"/>
+                </a:solidFill>
+                <a:latin typeface="맑은 고딕" panose="020B0503020000020004" pitchFamily="50" charset="-127"/>
+              </a:rPr>
+              <a:t>DB </a:t>
+            </a:r>
+            <a:r>
+              <a:rPr lang="ko-KR" altLang="en-US" sz="1100">
+                <a:solidFill>
+                  <a:srgbClr val="5F6F69"/>
+                </a:solidFill>
+                <a:latin typeface="맑은 고딕" panose="020B0503020000020004" pitchFamily="50" charset="-127"/>
+              </a:rPr>
+              <a:t>트리거가 남긴 수정 이력</a:t>
+            </a:r>
+          </a:p>
+        </p:txBody>
+      </p:sp>
+      <p:sp>
+        <p:nvSpPr>
+          <p:cNvPr id="7" name="TextBox 6">
+            <a:extLst>
+              <a:ext uri="{FF2B5EF4-FFF2-40B4-BE49-F238E27FC236}">
+                <a16:creationId xmlns:a16="http://schemas.microsoft.com/office/drawing/2014/main" id="{7138839D-A5EF-4C24-8C32-4356C94E2885}"/>
+              </a:ext>
+            </a:extLst>
+          </p:cNvPr>
+          <p:cNvSpPr txBox="1"/>
+          <p:nvPr/>
+        </p:nvSpPr>
+        <p:spPr>
+          <a:xfrm>
+            <a:off x="7818120" y="6446520"/>
+            <a:ext cx="3749040" cy="123111"/>
+          </a:xfrm>
+          <a:prstGeom prst="rect">
+            <a:avLst/>
+          </a:prstGeom>
+          <a:noFill/>
+        </p:spPr>
+        <p:txBody>
+          <a:bodyPr vert="horz" wrap="square" lIns="0" tIns="0" rIns="0" bIns="0" rtlCol="0">
+            <a:spAutoFit/>
+          </a:bodyPr>
+          <a:lstStyle/>
+          <a:p>
+            <a:r>
+              <a:rPr lang="en-US" altLang="ko-KR" sz="800">
+                <a:solidFill>
+                  <a:srgbClr val="5F6F69"/>
+                </a:solidFill>
+                <a:latin typeface="맑은 고딕" panose="020B0503020000020004" pitchFamily="50" charset="-127"/>
+              </a:rPr>
+              <a:t>1920×1080 PC </a:t>
+            </a:r>
+            <a:r>
+              <a:rPr lang="ko-KR" altLang="en-US" sz="800">
+                <a:solidFill>
+                  <a:srgbClr val="5F6F69"/>
+                </a:solidFill>
+                <a:latin typeface="맑은 고딕" panose="020B0503020000020004" pitchFamily="50" charset="-127"/>
+              </a:rPr>
+              <a:t>데스크톱 기준 </a:t>
+            </a:r>
+            <a:r>
+              <a:rPr lang="en-US" altLang="ko-KR" sz="800">
+                <a:solidFill>
+                  <a:srgbClr val="5F6F69"/>
+                </a:solidFill>
+                <a:latin typeface="맑은 고딕" panose="020B0503020000020004" pitchFamily="50" charset="-127"/>
+              </a:rPr>
+              <a:t>· 2026-09-01</a:t>
+            </a:r>
+            <a:endParaRPr lang="ko-KR" altLang="en-US" sz="800">
+              <a:solidFill>
+                <a:srgbClr val="5F6F69"/>
+              </a:solidFill>
+              <a:latin typeface="맑은 고딕" panose="020B0503020000020004" pitchFamily="50" charset="-127"/>
+            </a:endParaRPr>
+          </a:p>
+        </p:txBody>
+      </p:sp>
+      <p:pic>
+        <p:nvPicPr>
+          <p:cNvPr id="6" name="그림 5">
+            <a:extLst>
+              <a:ext uri="{FF2B5EF4-FFF2-40B4-BE49-F238E27FC236}">
+                <a16:creationId xmlns:a16="http://schemas.microsoft.com/office/drawing/2014/main" id="{8C3604E2-8984-44AA-B12D-0C0BC56046F5}"/>
+              </a:ext>
+            </a:extLst>
+          </p:cNvPr>
+          <p:cNvPicPr>
+            <a:picLocks/>
+          </p:cNvPicPr>
+          <p:nvPr/>
+        </p:nvPicPr>
+        <p:blipFill>
+          <a:blip r:embed="rId2"/>
+          <a:stretch>
+            <a:fillRect/>
+          </a:stretch>
+        </p:blipFill>
+        <p:spPr>
+          <a:xfrm>
+            <a:off x="1827276" y="1444752"/>
+            <a:ext cx="8534400" cy="4800600"/>
+          </a:xfrm>
+          <a:prstGeom prst="rect">
+            <a:avLst/>
+          </a:prstGeom>
+        </p:spPr>
+      </p:pic>
     </p:spTree>
+    <p:extLst>
+      <p:ext uri="{BB962C8B-B14F-4D97-AF65-F5344CB8AC3E}">
+        <p14:creationId xmlns:p14="http://schemas.microsoft.com/office/powerpoint/2010/main" val="3873829900"/>
+      </p:ext>
+    </p:extLst>
+  </p:cSld>
+  <p:clrMapOvr>
+    <a:masterClrMapping/>
+  </p:clrMapOvr>
+</p:sld>
+</file>
+
+<file path=ppt/slides/slide19.xml><?xml version="1.0" encoding="utf-8"?>
+<p:sld xmlns:a="http://schemas.openxmlformats.org/drawingml/2006/main" xmlns:r="http://schemas.openxmlformats.org/officeDocument/2006/relationships" xmlns:p="http://schemas.openxmlformats.org/presentationml/2006/main">
+  <p:cSld>
+    <p:bg>
+      <p:bgPr>
+        <a:solidFill>
+          <a:srgbClr val="FCFCF8"/>
+        </a:solidFill>
+        <a:effectLst/>
+      </p:bgPr>
+    </p:bg>
+    <p:spTree>
+      <p:nvGrpSpPr>
+        <p:cNvPr id="1" name=""/>
+        <p:cNvGrpSpPr/>
+        <p:nvPr/>
+      </p:nvGrpSpPr>
+      <p:grpSpPr>
+        <a:xfrm>
+          <a:off x="0" y="0"/>
+          <a:ext cx="0" cy="0"/>
+          <a:chOff x="0" y="0"/>
+          <a:chExt cx="0" cy="0"/>
+        </a:xfrm>
+      </p:grpSpPr>
+      <p:sp>
+        <p:nvSpPr>
+          <p:cNvPr id="2" name="TextBox 1">
+            <a:extLst>
+              <a:ext uri="{FF2B5EF4-FFF2-40B4-BE49-F238E27FC236}">
+                <a16:creationId xmlns:a16="http://schemas.microsoft.com/office/drawing/2014/main" id="{B0B3D6FA-52D3-4EF7-B169-C420B09BE158}"/>
+              </a:ext>
+            </a:extLst>
+          </p:cNvPr>
+          <p:cNvSpPr txBox="1"/>
+          <p:nvPr/>
+        </p:nvSpPr>
+        <p:spPr>
+          <a:xfrm>
+            <a:off x="594360" y="347472"/>
+            <a:ext cx="3657600" cy="169277"/>
+          </a:xfrm>
+          <a:prstGeom prst="rect">
+            <a:avLst/>
+          </a:prstGeom>
+          <a:noFill/>
+        </p:spPr>
+        <p:txBody>
+          <a:bodyPr vert="horz" wrap="square" lIns="0" tIns="0" rIns="0" bIns="0" rtlCol="0">
+            <a:spAutoFit/>
+          </a:bodyPr>
+          <a:lstStyle/>
+          <a:p>
+            <a:r>
+              <a:rPr lang="en-US" altLang="ko-KR" sz="1100" b="1">
+                <a:solidFill>
+                  <a:srgbClr val="146B58"/>
+                </a:solidFill>
+                <a:latin typeface="맑은 고딕" panose="020B0503020000020004" pitchFamily="50" charset="-127"/>
+              </a:rPr>
+              <a:t>PC </a:t>
+            </a:r>
+            <a:r>
+              <a:rPr lang="ko-KR" altLang="en-US" sz="1100" b="1">
+                <a:solidFill>
+                  <a:srgbClr val="146B58"/>
+                </a:solidFill>
+                <a:latin typeface="맑은 고딕" panose="020B0503020000020004" pitchFamily="50" charset="-127"/>
+              </a:rPr>
+              <a:t>증거 </a:t>
+            </a:r>
+            <a:r>
+              <a:rPr lang="en-US" altLang="ko-KR" sz="1100" b="1">
+                <a:solidFill>
+                  <a:srgbClr val="146B58"/>
+                </a:solidFill>
+                <a:latin typeface="맑은 고딕" panose="020B0503020000020004" pitchFamily="50" charset="-127"/>
+              </a:rPr>
+              <a:t>2/7 · C09~C22</a:t>
+            </a:r>
+            <a:endParaRPr lang="ko-KR" altLang="en-US" sz="1100" b="1">
+              <a:solidFill>
+                <a:srgbClr val="146B58"/>
+              </a:solidFill>
+              <a:latin typeface="맑은 고딕" panose="020B0503020000020004" pitchFamily="50" charset="-127"/>
+            </a:endParaRPr>
+          </a:p>
+        </p:txBody>
+      </p:sp>
+      <p:sp>
+        <p:nvSpPr>
+          <p:cNvPr id="3" name="TextBox 2">
+            <a:extLst>
+              <a:ext uri="{FF2B5EF4-FFF2-40B4-BE49-F238E27FC236}">
+                <a16:creationId xmlns:a16="http://schemas.microsoft.com/office/drawing/2014/main" id="{D3DBA4CB-5471-4D64-AD77-325B1EF8D4EF}"/>
+              </a:ext>
+            </a:extLst>
+          </p:cNvPr>
+          <p:cNvSpPr txBox="1"/>
+          <p:nvPr/>
+        </p:nvSpPr>
+        <p:spPr>
+          <a:xfrm>
+            <a:off x="594360" y="658368"/>
+            <a:ext cx="8046720" cy="384721"/>
+          </a:xfrm>
+          <a:prstGeom prst="rect">
+            <a:avLst/>
+          </a:prstGeom>
+          <a:noFill/>
+        </p:spPr>
+        <p:txBody>
+          <a:bodyPr vert="horz" wrap="square" lIns="0" tIns="0" rIns="0" bIns="0" rtlCol="0">
+            <a:spAutoFit/>
+          </a:bodyPr>
+          <a:lstStyle/>
+          <a:p>
+            <a:r>
+              <a:rPr lang="ko-KR" altLang="en-US" sz="2500" b="1">
+                <a:solidFill>
+                  <a:srgbClr val="17372F"/>
+                </a:solidFill>
+                <a:latin typeface="맑은 고딕" panose="020B0503020000020004" pitchFamily="50" charset="-127"/>
+              </a:rPr>
+              <a:t>할 일</a:t>
+            </a:r>
+            <a:r>
+              <a:rPr lang="en-US" altLang="ko-KR" sz="2500" b="1">
+                <a:solidFill>
+                  <a:srgbClr val="17372F"/>
+                </a:solidFill>
+                <a:latin typeface="맑은 고딕" panose="020B0503020000020004" pitchFamily="50" charset="-127"/>
+              </a:rPr>
+              <a:t>·</a:t>
+            </a:r>
+            <a:r>
+              <a:rPr lang="ko-KR" altLang="en-US" sz="2500" b="1">
+                <a:solidFill>
+                  <a:srgbClr val="17372F"/>
+                </a:solidFill>
+                <a:latin typeface="맑은 고딕" panose="020B0503020000020004" pitchFamily="50" charset="-127"/>
+              </a:rPr>
+              <a:t>정렬</a:t>
+            </a:r>
+            <a:r>
+              <a:rPr lang="en-US" altLang="ko-KR" sz="2500" b="1">
+                <a:solidFill>
+                  <a:srgbClr val="17372F"/>
+                </a:solidFill>
+                <a:latin typeface="맑은 고딕" panose="020B0503020000020004" pitchFamily="50" charset="-127"/>
+              </a:rPr>
+              <a:t>·</a:t>
+            </a:r>
+            <a:r>
+              <a:rPr lang="ko-KR" altLang="en-US" sz="2500" b="1">
+                <a:solidFill>
+                  <a:srgbClr val="17372F"/>
+                </a:solidFill>
+                <a:latin typeface="맑은 고딕" panose="020B0503020000020004" pitchFamily="50" charset="-127"/>
+              </a:rPr>
+              <a:t>완료</a:t>
+            </a:r>
+          </a:p>
+        </p:txBody>
+      </p:sp>
+      <p:sp>
+        <p:nvSpPr>
+          <p:cNvPr id="4" name="TextBox 3">
+            <a:extLst>
+              <a:ext uri="{FF2B5EF4-FFF2-40B4-BE49-F238E27FC236}">
+                <a16:creationId xmlns:a16="http://schemas.microsoft.com/office/drawing/2014/main" id="{429DE37D-2B31-495B-A581-5B8A7F95F21A}"/>
+              </a:ext>
+            </a:extLst>
+          </p:cNvPr>
+          <p:cNvSpPr txBox="1"/>
+          <p:nvPr/>
+        </p:nvSpPr>
+        <p:spPr>
+          <a:xfrm>
+            <a:off x="594360" y="1078992"/>
+            <a:ext cx="10789920" cy="169277"/>
+          </a:xfrm>
+          <a:prstGeom prst="rect">
+            <a:avLst/>
+          </a:prstGeom>
+          <a:noFill/>
+        </p:spPr>
+        <p:txBody>
+          <a:bodyPr vert="horz" wrap="square" lIns="0" tIns="0" rIns="0" bIns="0" rtlCol="0">
+            <a:spAutoFit/>
+          </a:bodyPr>
+          <a:lstStyle/>
+          <a:p>
+            <a:r>
+              <a:rPr lang="ko-KR" altLang="en-US" sz="1100">
+                <a:solidFill>
+                  <a:srgbClr val="5F6F69"/>
+                </a:solidFill>
+                <a:latin typeface="맑은 고딕" panose="020B0503020000020004" pitchFamily="50" charset="-127"/>
+              </a:rPr>
+              <a:t>할 일 </a:t>
+            </a:r>
+            <a:r>
+              <a:rPr lang="en-US" altLang="ko-KR" sz="1100">
+                <a:solidFill>
+                  <a:srgbClr val="5F6F69"/>
+                </a:solidFill>
+                <a:latin typeface="맑은 고딕" panose="020B0503020000020004" pitchFamily="50" charset="-127"/>
+              </a:rPr>
+              <a:t>5</a:t>
+            </a:r>
+            <a:r>
+              <a:rPr lang="ko-KR" altLang="en-US" sz="1100">
+                <a:solidFill>
+                  <a:srgbClr val="5F6F69"/>
+                </a:solidFill>
+                <a:latin typeface="맑은 고딕" panose="020B0503020000020004" pitchFamily="50" charset="-127"/>
+              </a:rPr>
+              <a:t>건</a:t>
+            </a:r>
+            <a:r>
+              <a:rPr lang="en-US" altLang="ko-KR" sz="1100">
+                <a:solidFill>
+                  <a:srgbClr val="5F6F69"/>
+                </a:solidFill>
+                <a:latin typeface="맑은 고딕" panose="020B0503020000020004" pitchFamily="50" charset="-127"/>
+              </a:rPr>
+              <a:t>, </a:t>
+            </a:r>
+            <a:r>
+              <a:rPr lang="ko-KR" altLang="en-US" sz="1100">
+                <a:solidFill>
+                  <a:srgbClr val="5F6F69"/>
+                </a:solidFill>
+                <a:latin typeface="맑은 고딕" panose="020B0503020000020004" pitchFamily="50" charset="-127"/>
+              </a:rPr>
+              <a:t>검색</a:t>
+            </a:r>
+            <a:r>
+              <a:rPr lang="en-US" altLang="ko-KR" sz="1100">
+                <a:solidFill>
+                  <a:srgbClr val="5F6F69"/>
+                </a:solidFill>
+                <a:latin typeface="맑은 고딕" panose="020B0503020000020004" pitchFamily="50" charset="-127"/>
+              </a:rPr>
+              <a:t>·</a:t>
+            </a:r>
+            <a:r>
+              <a:rPr lang="ko-KR" altLang="en-US" sz="1100">
+                <a:solidFill>
+                  <a:srgbClr val="5F6F69"/>
+                </a:solidFill>
+                <a:latin typeface="맑은 고딕" panose="020B0503020000020004" pitchFamily="50" charset="-127"/>
+              </a:rPr>
+              <a:t>거르기</a:t>
+            </a:r>
+            <a:r>
+              <a:rPr lang="en-US" altLang="ko-KR" sz="1100">
+                <a:solidFill>
+                  <a:srgbClr val="5F6F69"/>
+                </a:solidFill>
+                <a:latin typeface="맑은 고딕" panose="020B0503020000020004" pitchFamily="50" charset="-127"/>
+              </a:rPr>
+              <a:t>·</a:t>
+            </a:r>
+            <a:r>
+              <a:rPr lang="ko-KR" altLang="en-US" sz="1100">
+                <a:solidFill>
+                  <a:srgbClr val="5F6F69"/>
+                </a:solidFill>
+                <a:latin typeface="맑은 고딕" panose="020B0503020000020004" pitchFamily="50" charset="-127"/>
+              </a:rPr>
+              <a:t>고정 정렬과 완료</a:t>
+            </a:r>
+            <a:r>
+              <a:rPr lang="en-US" altLang="ko-KR" sz="1100">
+                <a:solidFill>
+                  <a:srgbClr val="5F6F69"/>
+                </a:solidFill>
+                <a:latin typeface="맑은 고딕" panose="020B0503020000020004" pitchFamily="50" charset="-127"/>
+              </a:rPr>
+              <a:t>·</a:t>
+            </a:r>
+            <a:r>
+              <a:rPr lang="ko-KR" altLang="en-US" sz="1100">
+                <a:solidFill>
+                  <a:srgbClr val="5F6F69"/>
+                </a:solidFill>
+                <a:latin typeface="맑은 고딕" panose="020B0503020000020004" pitchFamily="50" charset="-127"/>
+              </a:rPr>
+              <a:t>되돌리기</a:t>
+            </a:r>
+          </a:p>
+        </p:txBody>
+      </p:sp>
+      <p:sp>
+        <p:nvSpPr>
+          <p:cNvPr id="7" name="TextBox 6">
+            <a:extLst>
+              <a:ext uri="{FF2B5EF4-FFF2-40B4-BE49-F238E27FC236}">
+                <a16:creationId xmlns:a16="http://schemas.microsoft.com/office/drawing/2014/main" id="{4A309462-9E14-4B2A-9657-8C79A77C9A3B}"/>
+              </a:ext>
+            </a:extLst>
+          </p:cNvPr>
+          <p:cNvSpPr txBox="1"/>
+          <p:nvPr/>
+        </p:nvSpPr>
+        <p:spPr>
+          <a:xfrm>
+            <a:off x="7818120" y="6446520"/>
+            <a:ext cx="3749040" cy="123111"/>
+          </a:xfrm>
+          <a:prstGeom prst="rect">
+            <a:avLst/>
+          </a:prstGeom>
+          <a:noFill/>
+        </p:spPr>
+        <p:txBody>
+          <a:bodyPr vert="horz" wrap="square" lIns="0" tIns="0" rIns="0" bIns="0" rtlCol="0">
+            <a:spAutoFit/>
+          </a:bodyPr>
+          <a:lstStyle/>
+          <a:p>
+            <a:r>
+              <a:rPr lang="en-US" altLang="ko-KR" sz="800">
+                <a:solidFill>
+                  <a:srgbClr val="5F6F69"/>
+                </a:solidFill>
+                <a:latin typeface="맑은 고딕" panose="020B0503020000020004" pitchFamily="50" charset="-127"/>
+              </a:rPr>
+              <a:t>1920×1080 PC </a:t>
+            </a:r>
+            <a:r>
+              <a:rPr lang="ko-KR" altLang="en-US" sz="800">
+                <a:solidFill>
+                  <a:srgbClr val="5F6F69"/>
+                </a:solidFill>
+                <a:latin typeface="맑은 고딕" panose="020B0503020000020004" pitchFamily="50" charset="-127"/>
+              </a:rPr>
+              <a:t>데스크톱 기준 </a:t>
+            </a:r>
+            <a:r>
+              <a:rPr lang="en-US" altLang="ko-KR" sz="800">
+                <a:solidFill>
+                  <a:srgbClr val="5F6F69"/>
+                </a:solidFill>
+                <a:latin typeface="맑은 고딕" panose="020B0503020000020004" pitchFamily="50" charset="-127"/>
+              </a:rPr>
+              <a:t>· 2026-09-01</a:t>
+            </a:r>
+            <a:endParaRPr lang="ko-KR" altLang="en-US" sz="800">
+              <a:solidFill>
+                <a:srgbClr val="5F6F69"/>
+              </a:solidFill>
+              <a:latin typeface="맑은 고딕" panose="020B0503020000020004" pitchFamily="50" charset="-127"/>
+            </a:endParaRPr>
+          </a:p>
+        </p:txBody>
+      </p:sp>
+      <p:pic>
+        <p:nvPicPr>
+          <p:cNvPr id="6" name="그림 5">
+            <a:extLst>
+              <a:ext uri="{FF2B5EF4-FFF2-40B4-BE49-F238E27FC236}">
+                <a16:creationId xmlns:a16="http://schemas.microsoft.com/office/drawing/2014/main" id="{5FB680D0-0FAE-43D1-AF58-3C6597EDA22B}"/>
+              </a:ext>
+            </a:extLst>
+          </p:cNvPr>
+          <p:cNvPicPr>
+            <a:picLocks/>
+          </p:cNvPicPr>
+          <p:nvPr/>
+        </p:nvPicPr>
+        <p:blipFill>
+          <a:blip r:embed="rId2"/>
+          <a:stretch>
+            <a:fillRect/>
+          </a:stretch>
+        </p:blipFill>
+        <p:spPr>
+          <a:xfrm>
+            <a:off x="2107927" y="1444752"/>
+            <a:ext cx="7973098" cy="4800600"/>
+          </a:xfrm>
+          <a:prstGeom prst="rect">
+            <a:avLst/>
+          </a:prstGeom>
+        </p:spPr>
+      </p:pic>
+    </p:spTree>
+    <p:extLst>
+      <p:ext uri="{BB962C8B-B14F-4D97-AF65-F5344CB8AC3E}">
+        <p14:creationId xmlns:p14="http://schemas.microsoft.com/office/powerpoint/2010/main" val="610392472"/>
+      </p:ext>
+    </p:extLst>
   </p:cSld>
   <p:clrMapOvr>
     <a:masterClrMapping/>
@@ -28617,6 +28353,2650 @@
               <a:t>2026.09.01</a:t>
             </a:r>
             <a:endParaRPr lang="en-US" sz="850" dirty="0"/>
+          </a:p>
+        </p:txBody>
+      </p:sp>
+    </p:spTree>
+  </p:cSld>
+  <p:clrMapOvr>
+    <a:masterClrMapping/>
+  </p:clrMapOvr>
+</p:sld>
+</file>
+
+<file path=ppt/slides/slide20.xml><?xml version="1.0" encoding="utf-8"?>
+<p:sld xmlns:a="http://schemas.openxmlformats.org/drawingml/2006/main" xmlns:r="http://schemas.openxmlformats.org/officeDocument/2006/relationships" xmlns:p="http://schemas.openxmlformats.org/presentationml/2006/main">
+  <p:cSld>
+    <p:bg>
+      <p:bgPr>
+        <a:solidFill>
+          <a:srgbClr val="FCFCF8"/>
+        </a:solidFill>
+        <a:effectLst/>
+      </p:bgPr>
+    </p:bg>
+    <p:spTree>
+      <p:nvGrpSpPr>
+        <p:cNvPr id="1" name=""/>
+        <p:cNvGrpSpPr/>
+        <p:nvPr/>
+      </p:nvGrpSpPr>
+      <p:grpSpPr>
+        <a:xfrm>
+          <a:off x="0" y="0"/>
+          <a:ext cx="0" cy="0"/>
+          <a:chOff x="0" y="0"/>
+          <a:chExt cx="0" cy="0"/>
+        </a:xfrm>
+      </p:grpSpPr>
+      <p:sp>
+        <p:nvSpPr>
+          <p:cNvPr id="2" name="TextBox 1">
+            <a:extLst>
+              <a:ext uri="{FF2B5EF4-FFF2-40B4-BE49-F238E27FC236}">
+                <a16:creationId xmlns:a16="http://schemas.microsoft.com/office/drawing/2014/main" id="{CA2736E9-027C-4AE1-9E98-085947146088}"/>
+              </a:ext>
+            </a:extLst>
+          </p:cNvPr>
+          <p:cNvSpPr txBox="1"/>
+          <p:nvPr/>
+        </p:nvSpPr>
+        <p:spPr>
+          <a:xfrm>
+            <a:off x="594360" y="347472"/>
+            <a:ext cx="3657600" cy="169277"/>
+          </a:xfrm>
+          <a:prstGeom prst="rect">
+            <a:avLst/>
+          </a:prstGeom>
+          <a:noFill/>
+        </p:spPr>
+        <p:txBody>
+          <a:bodyPr vert="horz" wrap="square" lIns="0" tIns="0" rIns="0" bIns="0" rtlCol="0">
+            <a:spAutoFit/>
+          </a:bodyPr>
+          <a:lstStyle/>
+          <a:p>
+            <a:r>
+              <a:rPr lang="en-US" altLang="ko-KR" sz="1100" b="1">
+                <a:solidFill>
+                  <a:srgbClr val="146B58"/>
+                </a:solidFill>
+                <a:latin typeface="맑은 고딕" panose="020B0503020000020004" pitchFamily="50" charset="-127"/>
+              </a:rPr>
+              <a:t>PC </a:t>
+            </a:r>
+            <a:r>
+              <a:rPr lang="ko-KR" altLang="en-US" sz="1100" b="1">
+                <a:solidFill>
+                  <a:srgbClr val="146B58"/>
+                </a:solidFill>
+                <a:latin typeface="맑은 고딕" panose="020B0503020000020004" pitchFamily="50" charset="-127"/>
+              </a:rPr>
+              <a:t>증거 </a:t>
+            </a:r>
+            <a:r>
+              <a:rPr lang="en-US" altLang="ko-KR" sz="1100" b="1">
+                <a:solidFill>
+                  <a:srgbClr val="146B58"/>
+                </a:solidFill>
+                <a:latin typeface="맑은 고딕" panose="020B0503020000020004" pitchFamily="50" charset="-127"/>
+              </a:rPr>
+              <a:t>3/7 · C23~C27</a:t>
+            </a:r>
+            <a:endParaRPr lang="ko-KR" altLang="en-US" sz="1100" b="1">
+              <a:solidFill>
+                <a:srgbClr val="146B58"/>
+              </a:solidFill>
+              <a:latin typeface="맑은 고딕" panose="020B0503020000020004" pitchFamily="50" charset="-127"/>
+            </a:endParaRPr>
+          </a:p>
+        </p:txBody>
+      </p:sp>
+      <p:sp>
+        <p:nvSpPr>
+          <p:cNvPr id="3" name="TextBox 2">
+            <a:extLst>
+              <a:ext uri="{FF2B5EF4-FFF2-40B4-BE49-F238E27FC236}">
+                <a16:creationId xmlns:a16="http://schemas.microsoft.com/office/drawing/2014/main" id="{E7D014BD-5F15-4865-ACBE-544B21F52E74}"/>
+              </a:ext>
+            </a:extLst>
+          </p:cNvPr>
+          <p:cNvSpPr txBox="1"/>
+          <p:nvPr/>
+        </p:nvSpPr>
+        <p:spPr>
+          <a:xfrm>
+            <a:off x="594360" y="658368"/>
+            <a:ext cx="8046720" cy="384721"/>
+          </a:xfrm>
+          <a:prstGeom prst="rect">
+            <a:avLst/>
+          </a:prstGeom>
+          <a:noFill/>
+        </p:spPr>
+        <p:txBody>
+          <a:bodyPr vert="horz" wrap="square" lIns="0" tIns="0" rIns="0" bIns="0" rtlCol="0">
+            <a:spAutoFit/>
+          </a:bodyPr>
+          <a:lstStyle/>
+          <a:p>
+            <a:r>
+              <a:rPr lang="ko-KR" altLang="en-US" sz="2500" b="1">
+                <a:solidFill>
+                  <a:srgbClr val="17372F"/>
+                </a:solidFill>
+                <a:latin typeface="맑은 고딕" panose="020B0503020000020004" pitchFamily="50" charset="-127"/>
+              </a:rPr>
+              <a:t>실행 기록</a:t>
+            </a:r>
+          </a:p>
+        </p:txBody>
+      </p:sp>
+      <p:sp>
+        <p:nvSpPr>
+          <p:cNvPr id="4" name="TextBox 3">
+            <a:extLst>
+              <a:ext uri="{FF2B5EF4-FFF2-40B4-BE49-F238E27FC236}">
+                <a16:creationId xmlns:a16="http://schemas.microsoft.com/office/drawing/2014/main" id="{CDE0501F-57F2-4EB0-80E3-19E4326A877E}"/>
+              </a:ext>
+            </a:extLst>
+          </p:cNvPr>
+          <p:cNvSpPr txBox="1"/>
+          <p:nvPr/>
+        </p:nvSpPr>
+        <p:spPr>
+          <a:xfrm>
+            <a:off x="594360" y="1078992"/>
+            <a:ext cx="10789920" cy="169277"/>
+          </a:xfrm>
+          <a:prstGeom prst="rect">
+            <a:avLst/>
+          </a:prstGeom>
+          <a:noFill/>
+        </p:spPr>
+        <p:txBody>
+          <a:bodyPr vert="horz" wrap="square" lIns="0" tIns="0" rIns="0" bIns="0" rtlCol="0">
+            <a:spAutoFit/>
+          </a:bodyPr>
+          <a:lstStyle/>
+          <a:p>
+            <a:r>
+              <a:rPr lang="ko-KR" altLang="en-US" sz="1100">
+                <a:solidFill>
+                  <a:srgbClr val="5F6F69"/>
+                </a:solidFill>
+                <a:latin typeface="맑은 고딕" panose="020B0503020000020004" pitchFamily="50" charset="-127"/>
+              </a:rPr>
+              <a:t>시작</a:t>
+            </a:r>
+            <a:r>
+              <a:rPr lang="en-US" altLang="ko-KR" sz="1100">
+                <a:solidFill>
+                  <a:srgbClr val="5F6F69"/>
+                </a:solidFill>
+                <a:latin typeface="맑은 고딕" panose="020B0503020000020004" pitchFamily="50" charset="-127"/>
+              </a:rPr>
+              <a:t>·</a:t>
+            </a:r>
+            <a:r>
+              <a:rPr lang="ko-KR" altLang="en-US" sz="1100">
+                <a:solidFill>
+                  <a:srgbClr val="5F6F69"/>
+                </a:solidFill>
+                <a:latin typeface="맑은 고딕" panose="020B0503020000020004" pitchFamily="50" charset="-127"/>
+              </a:rPr>
+              <a:t>종료</a:t>
+            </a:r>
+            <a:r>
+              <a:rPr lang="en-US" altLang="ko-KR" sz="1100">
+                <a:solidFill>
+                  <a:srgbClr val="5F6F69"/>
+                </a:solidFill>
+                <a:latin typeface="맑은 고딕" panose="020B0503020000020004" pitchFamily="50" charset="-127"/>
+              </a:rPr>
+              <a:t>·</a:t>
+            </a:r>
+            <a:r>
+              <a:rPr lang="ko-KR" altLang="en-US" sz="1100">
+                <a:solidFill>
+                  <a:srgbClr val="5F6F69"/>
+                </a:solidFill>
+                <a:latin typeface="맑은 고딕" panose="020B0503020000020004" pitchFamily="50" charset="-127"/>
+              </a:rPr>
+              <a:t>실제 시간</a:t>
+            </a:r>
+            <a:r>
+              <a:rPr lang="en-US" altLang="ko-KR" sz="1100">
+                <a:solidFill>
+                  <a:srgbClr val="5F6F69"/>
+                </a:solidFill>
+                <a:latin typeface="맑은 고딕" panose="020B0503020000020004" pitchFamily="50" charset="-127"/>
+              </a:rPr>
+              <a:t>·</a:t>
+            </a:r>
+            <a:r>
+              <a:rPr lang="ko-KR" altLang="en-US" sz="1100">
+                <a:solidFill>
+                  <a:srgbClr val="5F6F69"/>
+                </a:solidFill>
+                <a:latin typeface="맑은 고딕" panose="020B0503020000020004" pitchFamily="50" charset="-127"/>
+              </a:rPr>
+              <a:t>막힌 이유가 할 일에 연결된 기록</a:t>
+            </a:r>
+          </a:p>
+        </p:txBody>
+      </p:sp>
+      <p:sp>
+        <p:nvSpPr>
+          <p:cNvPr id="7" name="TextBox 6">
+            <a:extLst>
+              <a:ext uri="{FF2B5EF4-FFF2-40B4-BE49-F238E27FC236}">
+                <a16:creationId xmlns:a16="http://schemas.microsoft.com/office/drawing/2014/main" id="{AB30A075-F0AE-462C-A089-F9FD6A75C68C}"/>
+              </a:ext>
+            </a:extLst>
+          </p:cNvPr>
+          <p:cNvSpPr txBox="1"/>
+          <p:nvPr/>
+        </p:nvSpPr>
+        <p:spPr>
+          <a:xfrm>
+            <a:off x="7818120" y="6446520"/>
+            <a:ext cx="3749040" cy="123111"/>
+          </a:xfrm>
+          <a:prstGeom prst="rect">
+            <a:avLst/>
+          </a:prstGeom>
+          <a:noFill/>
+        </p:spPr>
+        <p:txBody>
+          <a:bodyPr vert="horz" wrap="square" lIns="0" tIns="0" rIns="0" bIns="0" rtlCol="0">
+            <a:spAutoFit/>
+          </a:bodyPr>
+          <a:lstStyle/>
+          <a:p>
+            <a:r>
+              <a:rPr lang="en-US" altLang="ko-KR" sz="800">
+                <a:solidFill>
+                  <a:srgbClr val="5F6F69"/>
+                </a:solidFill>
+                <a:latin typeface="맑은 고딕" panose="020B0503020000020004" pitchFamily="50" charset="-127"/>
+              </a:rPr>
+              <a:t>1920×1080 PC </a:t>
+            </a:r>
+            <a:r>
+              <a:rPr lang="ko-KR" altLang="en-US" sz="800">
+                <a:solidFill>
+                  <a:srgbClr val="5F6F69"/>
+                </a:solidFill>
+                <a:latin typeface="맑은 고딕" panose="020B0503020000020004" pitchFamily="50" charset="-127"/>
+              </a:rPr>
+              <a:t>데스크톱 기준 </a:t>
+            </a:r>
+            <a:r>
+              <a:rPr lang="en-US" altLang="ko-KR" sz="800">
+                <a:solidFill>
+                  <a:srgbClr val="5F6F69"/>
+                </a:solidFill>
+                <a:latin typeface="맑은 고딕" panose="020B0503020000020004" pitchFamily="50" charset="-127"/>
+              </a:rPr>
+              <a:t>· 2026-09-01</a:t>
+            </a:r>
+            <a:endParaRPr lang="ko-KR" altLang="en-US" sz="800">
+              <a:solidFill>
+                <a:srgbClr val="5F6F69"/>
+              </a:solidFill>
+              <a:latin typeface="맑은 고딕" panose="020B0503020000020004" pitchFamily="50" charset="-127"/>
+            </a:endParaRPr>
+          </a:p>
+        </p:txBody>
+      </p:sp>
+      <p:pic>
+        <p:nvPicPr>
+          <p:cNvPr id="6" name="그림 5">
+            <a:extLst>
+              <a:ext uri="{FF2B5EF4-FFF2-40B4-BE49-F238E27FC236}">
+                <a16:creationId xmlns:a16="http://schemas.microsoft.com/office/drawing/2014/main" id="{8CF17969-897F-42A1-92E2-15E7D6AF4C93}"/>
+              </a:ext>
+            </a:extLst>
+          </p:cNvPr>
+          <p:cNvPicPr>
+            <a:picLocks/>
+          </p:cNvPicPr>
+          <p:nvPr/>
+        </p:nvPicPr>
+        <p:blipFill>
+          <a:blip r:embed="rId2"/>
+          <a:stretch>
+            <a:fillRect/>
+          </a:stretch>
+        </p:blipFill>
+        <p:spPr>
+          <a:xfrm>
+            <a:off x="2439343" y="1444752"/>
+            <a:ext cx="7310266" cy="4800600"/>
+          </a:xfrm>
+          <a:prstGeom prst="rect">
+            <a:avLst/>
+          </a:prstGeom>
+        </p:spPr>
+      </p:pic>
+    </p:spTree>
+    <p:extLst>
+      <p:ext uri="{BB962C8B-B14F-4D97-AF65-F5344CB8AC3E}">
+        <p14:creationId xmlns:p14="http://schemas.microsoft.com/office/powerpoint/2010/main" val="1135562690"/>
+      </p:ext>
+    </p:extLst>
+  </p:cSld>
+  <p:clrMapOvr>
+    <a:masterClrMapping/>
+  </p:clrMapOvr>
+</p:sld>
+</file>
+
+<file path=ppt/slides/slide21.xml><?xml version="1.0" encoding="utf-8"?>
+<p:sld xmlns:a="http://schemas.openxmlformats.org/drawingml/2006/main" xmlns:r="http://schemas.openxmlformats.org/officeDocument/2006/relationships" xmlns:p="http://schemas.openxmlformats.org/presentationml/2006/main">
+  <p:cSld>
+    <p:bg>
+      <p:bgPr>
+        <a:solidFill>
+          <a:srgbClr val="FCFCF8"/>
+        </a:solidFill>
+        <a:effectLst/>
+      </p:bgPr>
+    </p:bg>
+    <p:spTree>
+      <p:nvGrpSpPr>
+        <p:cNvPr id="1" name=""/>
+        <p:cNvGrpSpPr/>
+        <p:nvPr/>
+      </p:nvGrpSpPr>
+      <p:grpSpPr>
+        <a:xfrm>
+          <a:off x="0" y="0"/>
+          <a:ext cx="0" cy="0"/>
+          <a:chOff x="0" y="0"/>
+          <a:chExt cx="0" cy="0"/>
+        </a:xfrm>
+      </p:grpSpPr>
+      <p:sp>
+        <p:nvSpPr>
+          <p:cNvPr id="2" name="TextBox 1">
+            <a:extLst>
+              <a:ext uri="{FF2B5EF4-FFF2-40B4-BE49-F238E27FC236}">
+                <a16:creationId xmlns:a16="http://schemas.microsoft.com/office/drawing/2014/main" id="{77E4DEC9-F707-4A2D-A426-631DA8BACA59}"/>
+              </a:ext>
+            </a:extLst>
+          </p:cNvPr>
+          <p:cNvSpPr txBox="1"/>
+          <p:nvPr/>
+        </p:nvSpPr>
+        <p:spPr>
+          <a:xfrm>
+            <a:off x="594360" y="347472"/>
+            <a:ext cx="3657600" cy="169277"/>
+          </a:xfrm>
+          <a:prstGeom prst="rect">
+            <a:avLst/>
+          </a:prstGeom>
+          <a:noFill/>
+        </p:spPr>
+        <p:txBody>
+          <a:bodyPr vert="horz" wrap="square" lIns="0" tIns="0" rIns="0" bIns="0" rtlCol="0">
+            <a:spAutoFit/>
+          </a:bodyPr>
+          <a:lstStyle/>
+          <a:p>
+            <a:r>
+              <a:rPr lang="en-US" altLang="ko-KR" sz="1100" b="1">
+                <a:solidFill>
+                  <a:srgbClr val="146B58"/>
+                </a:solidFill>
+                <a:latin typeface="맑은 고딕" panose="020B0503020000020004" pitchFamily="50" charset="-127"/>
+              </a:rPr>
+              <a:t>PC </a:t>
+            </a:r>
+            <a:r>
+              <a:rPr lang="ko-KR" altLang="en-US" sz="1100" b="1">
+                <a:solidFill>
+                  <a:srgbClr val="146B58"/>
+                </a:solidFill>
+                <a:latin typeface="맑은 고딕" panose="020B0503020000020004" pitchFamily="50" charset="-127"/>
+              </a:rPr>
+              <a:t>증거 </a:t>
+            </a:r>
+            <a:r>
+              <a:rPr lang="en-US" altLang="ko-KR" sz="1100" b="1">
+                <a:solidFill>
+                  <a:srgbClr val="146B58"/>
+                </a:solidFill>
+                <a:latin typeface="맑은 고딕" panose="020B0503020000020004" pitchFamily="50" charset="-127"/>
+              </a:rPr>
+              <a:t>4/7 · C28~C33 · C83</a:t>
+            </a:r>
+            <a:endParaRPr lang="ko-KR" altLang="en-US" sz="1100" b="1">
+              <a:solidFill>
+                <a:srgbClr val="146B58"/>
+              </a:solidFill>
+              <a:latin typeface="맑은 고딕" panose="020B0503020000020004" pitchFamily="50" charset="-127"/>
+            </a:endParaRPr>
+          </a:p>
+        </p:txBody>
+      </p:sp>
+      <p:sp>
+        <p:nvSpPr>
+          <p:cNvPr id="3" name="TextBox 2">
+            <a:extLst>
+              <a:ext uri="{FF2B5EF4-FFF2-40B4-BE49-F238E27FC236}">
+                <a16:creationId xmlns:a16="http://schemas.microsoft.com/office/drawing/2014/main" id="{7FB1C6D0-D20A-4A08-9BE8-1E17C3D5708A}"/>
+              </a:ext>
+            </a:extLst>
+          </p:cNvPr>
+          <p:cNvSpPr txBox="1"/>
+          <p:nvPr/>
+        </p:nvSpPr>
+        <p:spPr>
+          <a:xfrm>
+            <a:off x="594360" y="658368"/>
+            <a:ext cx="8046720" cy="384721"/>
+          </a:xfrm>
+          <a:prstGeom prst="rect">
+            <a:avLst/>
+          </a:prstGeom>
+          <a:noFill/>
+        </p:spPr>
+        <p:txBody>
+          <a:bodyPr vert="horz" wrap="square" lIns="0" tIns="0" rIns="0" bIns="0" rtlCol="0">
+            <a:spAutoFit/>
+          </a:bodyPr>
+          <a:lstStyle/>
+          <a:p>
+            <a:r>
+              <a:rPr lang="ko-KR" altLang="en-US" sz="2500" b="1">
+                <a:solidFill>
+                  <a:srgbClr val="17372F"/>
+                </a:solidFill>
+                <a:latin typeface="맑은 고딕" panose="020B0503020000020004" pitchFamily="50" charset="-127"/>
+              </a:rPr>
+              <a:t>돌아보기 집계</a:t>
+            </a:r>
+          </a:p>
+        </p:txBody>
+      </p:sp>
+      <p:sp>
+        <p:nvSpPr>
+          <p:cNvPr id="4" name="TextBox 3">
+            <a:extLst>
+              <a:ext uri="{FF2B5EF4-FFF2-40B4-BE49-F238E27FC236}">
+                <a16:creationId xmlns:a16="http://schemas.microsoft.com/office/drawing/2014/main" id="{2EFE8371-5F09-4674-9A5D-A0AD866C8C17}"/>
+              </a:ext>
+            </a:extLst>
+          </p:cNvPr>
+          <p:cNvSpPr txBox="1"/>
+          <p:nvPr/>
+        </p:nvSpPr>
+        <p:spPr>
+          <a:xfrm>
+            <a:off x="594360" y="1078992"/>
+            <a:ext cx="10789920" cy="169277"/>
+          </a:xfrm>
+          <a:prstGeom prst="rect">
+            <a:avLst/>
+          </a:prstGeom>
+          <a:noFill/>
+        </p:spPr>
+        <p:txBody>
+          <a:bodyPr vert="horz" wrap="square" lIns="0" tIns="0" rIns="0" bIns="0" rtlCol="0">
+            <a:spAutoFit/>
+          </a:bodyPr>
+          <a:lstStyle/>
+          <a:p>
+            <a:r>
+              <a:rPr lang="ko-KR" altLang="en-US" sz="1100">
+                <a:solidFill>
+                  <a:srgbClr val="5F6F69"/>
+                </a:solidFill>
+                <a:latin typeface="맑은 고딕" panose="020B0503020000020004" pitchFamily="50" charset="-127"/>
+              </a:rPr>
+              <a:t>계획</a:t>
+            </a:r>
+            <a:r>
+              <a:rPr lang="en-US" altLang="ko-KR" sz="1100">
+                <a:solidFill>
+                  <a:srgbClr val="5F6F69"/>
+                </a:solidFill>
+                <a:latin typeface="맑은 고딕" panose="020B0503020000020004" pitchFamily="50" charset="-127"/>
+              </a:rPr>
+              <a:t>·</a:t>
+            </a:r>
+            <a:r>
+              <a:rPr lang="ko-KR" altLang="en-US" sz="1100">
+                <a:solidFill>
+                  <a:srgbClr val="5F6F69"/>
+                </a:solidFill>
+                <a:latin typeface="맑은 고딕" panose="020B0503020000020004" pitchFamily="50" charset="-127"/>
+              </a:rPr>
+              <a:t>완료</a:t>
+            </a:r>
+            <a:r>
+              <a:rPr lang="en-US" altLang="ko-KR" sz="1100">
+                <a:solidFill>
+                  <a:srgbClr val="5F6F69"/>
+                </a:solidFill>
+                <a:latin typeface="맑은 고딕" panose="020B0503020000020004" pitchFamily="50" charset="-127"/>
+              </a:rPr>
+              <a:t>·</a:t>
+            </a:r>
+            <a:r>
+              <a:rPr lang="ko-KR" altLang="en-US" sz="1100">
+                <a:solidFill>
+                  <a:srgbClr val="5F6F69"/>
+                </a:solidFill>
+                <a:latin typeface="맑은 고딕" panose="020B0503020000020004" pitchFamily="50" charset="-127"/>
+              </a:rPr>
+              <a:t>지연</a:t>
+            </a:r>
+            <a:r>
+              <a:rPr lang="en-US" altLang="ko-KR" sz="1100">
+                <a:solidFill>
+                  <a:srgbClr val="5F6F69"/>
+                </a:solidFill>
+                <a:latin typeface="맑은 고딕" panose="020B0503020000020004" pitchFamily="50" charset="-127"/>
+              </a:rPr>
+              <a:t>·</a:t>
+            </a:r>
+            <a:r>
+              <a:rPr lang="ko-KR" altLang="en-US" sz="1100">
+                <a:solidFill>
+                  <a:srgbClr val="5F6F69"/>
+                </a:solidFill>
+                <a:latin typeface="맑은 고딕" panose="020B0503020000020004" pitchFamily="50" charset="-127"/>
+              </a:rPr>
+              <a:t>막힘</a:t>
+            </a:r>
+            <a:r>
+              <a:rPr lang="en-US" altLang="ko-KR" sz="1100">
+                <a:solidFill>
+                  <a:srgbClr val="5F6F69"/>
+                </a:solidFill>
+                <a:latin typeface="맑은 고딕" panose="020B0503020000020004" pitchFamily="50" charset="-127"/>
+              </a:rPr>
+              <a:t>·</a:t>
+            </a:r>
+            <a:r>
+              <a:rPr lang="ko-KR" altLang="en-US" sz="1100">
+                <a:solidFill>
+                  <a:srgbClr val="5F6F69"/>
+                </a:solidFill>
+                <a:latin typeface="맑은 고딕" panose="020B0503020000020004" pitchFamily="50" charset="-127"/>
+              </a:rPr>
+              <a:t>예상</a:t>
+            </a:r>
+            <a:r>
+              <a:rPr lang="en-US" altLang="ko-KR" sz="1100">
+                <a:solidFill>
+                  <a:srgbClr val="5F6F69"/>
+                </a:solidFill>
+                <a:latin typeface="맑은 고딕" panose="020B0503020000020004" pitchFamily="50" charset="-127"/>
+              </a:rPr>
+              <a:t>·</a:t>
+            </a:r>
+            <a:r>
+              <a:rPr lang="ko-KR" altLang="en-US" sz="1100">
+                <a:solidFill>
+                  <a:srgbClr val="5F6F69"/>
+                </a:solidFill>
+                <a:latin typeface="맑은 고딕" panose="020B0503020000020004" pitchFamily="50" charset="-127"/>
+              </a:rPr>
+              <a:t>실제 수치와 조회 기간</a:t>
+            </a:r>
+          </a:p>
+        </p:txBody>
+      </p:sp>
+      <p:sp>
+        <p:nvSpPr>
+          <p:cNvPr id="7" name="TextBox 6">
+            <a:extLst>
+              <a:ext uri="{FF2B5EF4-FFF2-40B4-BE49-F238E27FC236}">
+                <a16:creationId xmlns:a16="http://schemas.microsoft.com/office/drawing/2014/main" id="{DF42FFB2-8017-46C8-A20D-5F79D5F17A4F}"/>
+              </a:ext>
+            </a:extLst>
+          </p:cNvPr>
+          <p:cNvSpPr txBox="1"/>
+          <p:nvPr/>
+        </p:nvSpPr>
+        <p:spPr>
+          <a:xfrm>
+            <a:off x="7818120" y="6446520"/>
+            <a:ext cx="3749040" cy="123111"/>
+          </a:xfrm>
+          <a:prstGeom prst="rect">
+            <a:avLst/>
+          </a:prstGeom>
+          <a:noFill/>
+        </p:spPr>
+        <p:txBody>
+          <a:bodyPr vert="horz" wrap="square" lIns="0" tIns="0" rIns="0" bIns="0" rtlCol="0">
+            <a:spAutoFit/>
+          </a:bodyPr>
+          <a:lstStyle/>
+          <a:p>
+            <a:r>
+              <a:rPr lang="en-US" altLang="ko-KR" sz="800">
+                <a:solidFill>
+                  <a:srgbClr val="5F6F69"/>
+                </a:solidFill>
+                <a:latin typeface="맑은 고딕" panose="020B0503020000020004" pitchFamily="50" charset="-127"/>
+              </a:rPr>
+              <a:t>1920×1080 PC </a:t>
+            </a:r>
+            <a:r>
+              <a:rPr lang="ko-KR" altLang="en-US" sz="800">
+                <a:solidFill>
+                  <a:srgbClr val="5F6F69"/>
+                </a:solidFill>
+                <a:latin typeface="맑은 고딕" panose="020B0503020000020004" pitchFamily="50" charset="-127"/>
+              </a:rPr>
+              <a:t>데스크톱 기준 </a:t>
+            </a:r>
+            <a:r>
+              <a:rPr lang="en-US" altLang="ko-KR" sz="800">
+                <a:solidFill>
+                  <a:srgbClr val="5F6F69"/>
+                </a:solidFill>
+                <a:latin typeface="맑은 고딕" panose="020B0503020000020004" pitchFamily="50" charset="-127"/>
+              </a:rPr>
+              <a:t>· 2026-09-01</a:t>
+            </a:r>
+            <a:endParaRPr lang="ko-KR" altLang="en-US" sz="800">
+              <a:solidFill>
+                <a:srgbClr val="5F6F69"/>
+              </a:solidFill>
+              <a:latin typeface="맑은 고딕" panose="020B0503020000020004" pitchFamily="50" charset="-127"/>
+            </a:endParaRPr>
+          </a:p>
+        </p:txBody>
+      </p:sp>
+      <p:pic>
+        <p:nvPicPr>
+          <p:cNvPr id="6" name="그림 5">
+            <a:extLst>
+              <a:ext uri="{FF2B5EF4-FFF2-40B4-BE49-F238E27FC236}">
+                <a16:creationId xmlns:a16="http://schemas.microsoft.com/office/drawing/2014/main" id="{10A18568-8669-4551-B12D-796D7FA415C9}"/>
+              </a:ext>
+            </a:extLst>
+          </p:cNvPr>
+          <p:cNvPicPr>
+            <a:picLocks/>
+          </p:cNvPicPr>
+          <p:nvPr/>
+        </p:nvPicPr>
+        <p:blipFill>
+          <a:blip r:embed="rId2"/>
+          <a:stretch>
+            <a:fillRect/>
+          </a:stretch>
+        </p:blipFill>
+        <p:spPr>
+          <a:xfrm>
+            <a:off x="1827276" y="1444752"/>
+            <a:ext cx="8534400" cy="4800600"/>
+          </a:xfrm>
+          <a:prstGeom prst="rect">
+            <a:avLst/>
+          </a:prstGeom>
+        </p:spPr>
+      </p:pic>
+    </p:spTree>
+    <p:extLst>
+      <p:ext uri="{BB962C8B-B14F-4D97-AF65-F5344CB8AC3E}">
+        <p14:creationId xmlns:p14="http://schemas.microsoft.com/office/powerpoint/2010/main" val="2199596351"/>
+      </p:ext>
+    </p:extLst>
+  </p:cSld>
+  <p:clrMapOvr>
+    <a:masterClrMapping/>
+  </p:clrMapOvr>
+</p:sld>
+</file>
+
+<file path=ppt/slides/slide22.xml><?xml version="1.0" encoding="utf-8"?>
+<p:sld xmlns:a="http://schemas.openxmlformats.org/drawingml/2006/main" xmlns:r="http://schemas.openxmlformats.org/officeDocument/2006/relationships" xmlns:p="http://schemas.openxmlformats.org/presentationml/2006/main">
+  <p:cSld>
+    <p:bg>
+      <p:bgPr>
+        <a:solidFill>
+          <a:srgbClr val="FCFCF8"/>
+        </a:solidFill>
+        <a:effectLst/>
+      </p:bgPr>
+    </p:bg>
+    <p:spTree>
+      <p:nvGrpSpPr>
+        <p:cNvPr id="1" name=""/>
+        <p:cNvGrpSpPr/>
+        <p:nvPr/>
+      </p:nvGrpSpPr>
+      <p:grpSpPr>
+        <a:xfrm>
+          <a:off x="0" y="0"/>
+          <a:ext cx="0" cy="0"/>
+          <a:chOff x="0" y="0"/>
+          <a:chExt cx="0" cy="0"/>
+        </a:xfrm>
+      </p:grpSpPr>
+      <p:sp>
+        <p:nvSpPr>
+          <p:cNvPr id="2" name="TextBox 1">
+            <a:extLst>
+              <a:ext uri="{FF2B5EF4-FFF2-40B4-BE49-F238E27FC236}">
+                <a16:creationId xmlns:a16="http://schemas.microsoft.com/office/drawing/2014/main" id="{146D1877-428D-45CA-B8C7-A4EDE93A5BC5}"/>
+              </a:ext>
+            </a:extLst>
+          </p:cNvPr>
+          <p:cNvSpPr txBox="1"/>
+          <p:nvPr/>
+        </p:nvSpPr>
+        <p:spPr>
+          <a:xfrm>
+            <a:off x="594360" y="347472"/>
+            <a:ext cx="3657600" cy="169277"/>
+          </a:xfrm>
+          <a:prstGeom prst="rect">
+            <a:avLst/>
+          </a:prstGeom>
+          <a:noFill/>
+        </p:spPr>
+        <p:txBody>
+          <a:bodyPr vert="horz" wrap="square" lIns="0" tIns="0" rIns="0" bIns="0" rtlCol="0">
+            <a:spAutoFit/>
+          </a:bodyPr>
+          <a:lstStyle/>
+          <a:p>
+            <a:r>
+              <a:rPr lang="en-US" altLang="ko-KR" sz="1100" b="1">
+                <a:solidFill>
+                  <a:srgbClr val="146B58"/>
+                </a:solidFill>
+                <a:latin typeface="맑은 고딕" panose="020B0503020000020004" pitchFamily="50" charset="-127"/>
+              </a:rPr>
+              <a:t>PC </a:t>
+            </a:r>
+            <a:r>
+              <a:rPr lang="ko-KR" altLang="en-US" sz="1100" b="1">
+                <a:solidFill>
+                  <a:srgbClr val="146B58"/>
+                </a:solidFill>
+                <a:latin typeface="맑은 고딕" panose="020B0503020000020004" pitchFamily="50" charset="-127"/>
+              </a:rPr>
+              <a:t>증거 </a:t>
+            </a:r>
+            <a:r>
+              <a:rPr lang="en-US" altLang="ko-KR" sz="1100" b="1">
+                <a:solidFill>
+                  <a:srgbClr val="146B58"/>
+                </a:solidFill>
+                <a:latin typeface="맑은 고딕" panose="020B0503020000020004" pitchFamily="50" charset="-127"/>
+              </a:rPr>
+              <a:t>5/7 · C83</a:t>
+            </a:r>
+            <a:endParaRPr lang="ko-KR" altLang="en-US" sz="1100" b="1">
+              <a:solidFill>
+                <a:srgbClr val="146B58"/>
+              </a:solidFill>
+              <a:latin typeface="맑은 고딕" panose="020B0503020000020004" pitchFamily="50" charset="-127"/>
+            </a:endParaRPr>
+          </a:p>
+        </p:txBody>
+      </p:sp>
+      <p:sp>
+        <p:nvSpPr>
+          <p:cNvPr id="3" name="TextBox 2">
+            <a:extLst>
+              <a:ext uri="{FF2B5EF4-FFF2-40B4-BE49-F238E27FC236}">
+                <a16:creationId xmlns:a16="http://schemas.microsoft.com/office/drawing/2014/main" id="{F18B31EC-171A-43B5-A22E-2C60533F4A72}"/>
+              </a:ext>
+            </a:extLst>
+          </p:cNvPr>
+          <p:cNvSpPr txBox="1"/>
+          <p:nvPr/>
+        </p:nvSpPr>
+        <p:spPr>
+          <a:xfrm>
+            <a:off x="594360" y="658368"/>
+            <a:ext cx="8046720" cy="384721"/>
+          </a:xfrm>
+          <a:prstGeom prst="rect">
+            <a:avLst/>
+          </a:prstGeom>
+          <a:noFill/>
+        </p:spPr>
+        <p:txBody>
+          <a:bodyPr vert="horz" wrap="square" lIns="0" tIns="0" rIns="0" bIns="0" rtlCol="0">
+            <a:spAutoFit/>
+          </a:bodyPr>
+          <a:lstStyle/>
+          <a:p>
+            <a:r>
+              <a:rPr lang="ko-KR" altLang="en-US" sz="2500" b="1">
+                <a:solidFill>
+                  <a:srgbClr val="17372F"/>
+                </a:solidFill>
+                <a:latin typeface="맑은 고딕" panose="020B0503020000020004" pitchFamily="50" charset="-127"/>
+              </a:rPr>
+              <a:t>집계 근거 목록</a:t>
+            </a:r>
+          </a:p>
+        </p:txBody>
+      </p:sp>
+      <p:sp>
+        <p:nvSpPr>
+          <p:cNvPr id="4" name="TextBox 3">
+            <a:extLst>
+              <a:ext uri="{FF2B5EF4-FFF2-40B4-BE49-F238E27FC236}">
+                <a16:creationId xmlns:a16="http://schemas.microsoft.com/office/drawing/2014/main" id="{680CF0EA-CBA2-45E8-A4B2-3AADDAA31A89}"/>
+              </a:ext>
+            </a:extLst>
+          </p:cNvPr>
+          <p:cNvSpPr txBox="1"/>
+          <p:nvPr/>
+        </p:nvSpPr>
+        <p:spPr>
+          <a:xfrm>
+            <a:off x="594360" y="1078992"/>
+            <a:ext cx="10789920" cy="169277"/>
+          </a:xfrm>
+          <a:prstGeom prst="rect">
+            <a:avLst/>
+          </a:prstGeom>
+          <a:noFill/>
+        </p:spPr>
+        <p:txBody>
+          <a:bodyPr vert="horz" wrap="square" lIns="0" tIns="0" rIns="0" bIns="0" rtlCol="0">
+            <a:spAutoFit/>
+          </a:bodyPr>
+          <a:lstStyle/>
+          <a:p>
+            <a:r>
+              <a:rPr lang="ko-KR" altLang="en-US" sz="1100">
+                <a:solidFill>
+                  <a:srgbClr val="5F6F69"/>
+                </a:solidFill>
+                <a:latin typeface="맑은 고딕" panose="020B0503020000020004" pitchFamily="50" charset="-127"/>
+              </a:rPr>
+              <a:t>완료 수 </a:t>
+            </a:r>
+            <a:r>
+              <a:rPr lang="en-US" altLang="ko-KR" sz="1100">
+                <a:solidFill>
+                  <a:srgbClr val="5F6F69"/>
+                </a:solidFill>
+                <a:latin typeface="맑은 고딕" panose="020B0503020000020004" pitchFamily="50" charset="-127"/>
+              </a:rPr>
+              <a:t>1</a:t>
+            </a:r>
+            <a:r>
+              <a:rPr lang="ko-KR" altLang="en-US" sz="1100">
+                <a:solidFill>
+                  <a:srgbClr val="5F6F69"/>
+                </a:solidFill>
+                <a:latin typeface="맑은 고딕" panose="020B0503020000020004" pitchFamily="50" charset="-127"/>
+              </a:rPr>
+              <a:t>과 같은 조건으로 조회한 근거 목록 </a:t>
+            </a:r>
+            <a:r>
+              <a:rPr lang="en-US" altLang="ko-KR" sz="1100">
+                <a:solidFill>
+                  <a:srgbClr val="5F6F69"/>
+                </a:solidFill>
+                <a:latin typeface="맑은 고딕" panose="020B0503020000020004" pitchFamily="50" charset="-127"/>
+              </a:rPr>
+              <a:t>1</a:t>
+            </a:r>
+            <a:r>
+              <a:rPr lang="ko-KR" altLang="en-US" sz="1100">
+                <a:solidFill>
+                  <a:srgbClr val="5F6F69"/>
+                </a:solidFill>
+                <a:latin typeface="맑은 고딕" panose="020B0503020000020004" pitchFamily="50" charset="-127"/>
+              </a:rPr>
+              <a:t>건</a:t>
+            </a:r>
+          </a:p>
+        </p:txBody>
+      </p:sp>
+      <p:sp>
+        <p:nvSpPr>
+          <p:cNvPr id="7" name="TextBox 6">
+            <a:extLst>
+              <a:ext uri="{FF2B5EF4-FFF2-40B4-BE49-F238E27FC236}">
+                <a16:creationId xmlns:a16="http://schemas.microsoft.com/office/drawing/2014/main" id="{EB9C6B7C-CC33-4A8E-9111-C0A55679A505}"/>
+              </a:ext>
+            </a:extLst>
+          </p:cNvPr>
+          <p:cNvSpPr txBox="1"/>
+          <p:nvPr/>
+        </p:nvSpPr>
+        <p:spPr>
+          <a:xfrm>
+            <a:off x="7818120" y="6446520"/>
+            <a:ext cx="3749040" cy="123111"/>
+          </a:xfrm>
+          <a:prstGeom prst="rect">
+            <a:avLst/>
+          </a:prstGeom>
+          <a:noFill/>
+        </p:spPr>
+        <p:txBody>
+          <a:bodyPr vert="horz" wrap="square" lIns="0" tIns="0" rIns="0" bIns="0" rtlCol="0">
+            <a:spAutoFit/>
+          </a:bodyPr>
+          <a:lstStyle/>
+          <a:p>
+            <a:r>
+              <a:rPr lang="en-US" altLang="ko-KR" sz="800">
+                <a:solidFill>
+                  <a:srgbClr val="5F6F69"/>
+                </a:solidFill>
+                <a:latin typeface="맑은 고딕" panose="020B0503020000020004" pitchFamily="50" charset="-127"/>
+              </a:rPr>
+              <a:t>1920×1080 PC </a:t>
+            </a:r>
+            <a:r>
+              <a:rPr lang="ko-KR" altLang="en-US" sz="800">
+                <a:solidFill>
+                  <a:srgbClr val="5F6F69"/>
+                </a:solidFill>
+                <a:latin typeface="맑은 고딕" panose="020B0503020000020004" pitchFamily="50" charset="-127"/>
+              </a:rPr>
+              <a:t>데스크톱 기준 </a:t>
+            </a:r>
+            <a:r>
+              <a:rPr lang="en-US" altLang="ko-KR" sz="800">
+                <a:solidFill>
+                  <a:srgbClr val="5F6F69"/>
+                </a:solidFill>
+                <a:latin typeface="맑은 고딕" panose="020B0503020000020004" pitchFamily="50" charset="-127"/>
+              </a:rPr>
+              <a:t>· 2026-09-01</a:t>
+            </a:r>
+            <a:endParaRPr lang="ko-KR" altLang="en-US" sz="800">
+              <a:solidFill>
+                <a:srgbClr val="5F6F69"/>
+              </a:solidFill>
+              <a:latin typeface="맑은 고딕" panose="020B0503020000020004" pitchFamily="50" charset="-127"/>
+            </a:endParaRPr>
+          </a:p>
+        </p:txBody>
+      </p:sp>
+      <p:pic>
+        <p:nvPicPr>
+          <p:cNvPr id="6" name="그림 5">
+            <a:extLst>
+              <a:ext uri="{FF2B5EF4-FFF2-40B4-BE49-F238E27FC236}">
+                <a16:creationId xmlns:a16="http://schemas.microsoft.com/office/drawing/2014/main" id="{30F5FA54-A40C-4ADA-A2C0-066EF251C312}"/>
+              </a:ext>
+            </a:extLst>
+          </p:cNvPr>
+          <p:cNvPicPr>
+            <a:picLocks/>
+          </p:cNvPicPr>
+          <p:nvPr/>
+        </p:nvPicPr>
+        <p:blipFill>
+          <a:blip r:embed="rId2"/>
+          <a:stretch>
+            <a:fillRect/>
+          </a:stretch>
+        </p:blipFill>
+        <p:spPr>
+          <a:xfrm>
+            <a:off x="1827276" y="1444752"/>
+            <a:ext cx="8534400" cy="4800600"/>
+          </a:xfrm>
+          <a:prstGeom prst="rect">
+            <a:avLst/>
+          </a:prstGeom>
+        </p:spPr>
+      </p:pic>
+    </p:spTree>
+    <p:extLst>
+      <p:ext uri="{BB962C8B-B14F-4D97-AF65-F5344CB8AC3E}">
+        <p14:creationId xmlns:p14="http://schemas.microsoft.com/office/powerpoint/2010/main" val="2223813497"/>
+      </p:ext>
+    </p:extLst>
+  </p:cSld>
+  <p:clrMapOvr>
+    <a:masterClrMapping/>
+  </p:clrMapOvr>
+</p:sld>
+</file>
+
+<file path=ppt/slides/slide23.xml><?xml version="1.0" encoding="utf-8"?>
+<p:sld xmlns:a="http://schemas.openxmlformats.org/drawingml/2006/main" xmlns:r="http://schemas.openxmlformats.org/officeDocument/2006/relationships" xmlns:p="http://schemas.openxmlformats.org/presentationml/2006/main">
+  <p:cSld>
+    <p:bg>
+      <p:bgPr>
+        <a:solidFill>
+          <a:srgbClr val="FCFCF8"/>
+        </a:solidFill>
+        <a:effectLst/>
+      </p:bgPr>
+    </p:bg>
+    <p:spTree>
+      <p:nvGrpSpPr>
+        <p:cNvPr id="1" name=""/>
+        <p:cNvGrpSpPr/>
+        <p:nvPr/>
+      </p:nvGrpSpPr>
+      <p:grpSpPr>
+        <a:xfrm>
+          <a:off x="0" y="0"/>
+          <a:ext cx="0" cy="0"/>
+          <a:chOff x="0" y="0"/>
+          <a:chExt cx="0" cy="0"/>
+        </a:xfrm>
+      </p:grpSpPr>
+      <p:sp>
+        <p:nvSpPr>
+          <p:cNvPr id="2" name="TextBox 1">
+            <a:extLst>
+              <a:ext uri="{FF2B5EF4-FFF2-40B4-BE49-F238E27FC236}">
+                <a16:creationId xmlns:a16="http://schemas.microsoft.com/office/drawing/2014/main" id="{43939AA0-167D-4E31-BDEC-888CC5291483}"/>
+              </a:ext>
+            </a:extLst>
+          </p:cNvPr>
+          <p:cNvSpPr txBox="1"/>
+          <p:nvPr/>
+        </p:nvSpPr>
+        <p:spPr>
+          <a:xfrm>
+            <a:off x="594360" y="347472"/>
+            <a:ext cx="3657600" cy="169277"/>
+          </a:xfrm>
+          <a:prstGeom prst="rect">
+            <a:avLst/>
+          </a:prstGeom>
+          <a:noFill/>
+        </p:spPr>
+        <p:txBody>
+          <a:bodyPr vert="horz" wrap="square" lIns="0" tIns="0" rIns="0" bIns="0" rtlCol="0">
+            <a:spAutoFit/>
+          </a:bodyPr>
+          <a:lstStyle/>
+          <a:p>
+            <a:r>
+              <a:rPr lang="en-US" altLang="ko-KR" sz="1100" b="1">
+                <a:solidFill>
+                  <a:srgbClr val="146B58"/>
+                </a:solidFill>
+                <a:latin typeface="맑은 고딕" panose="020B0503020000020004" pitchFamily="50" charset="-127"/>
+              </a:rPr>
+              <a:t>PC </a:t>
+            </a:r>
+            <a:r>
+              <a:rPr lang="ko-KR" altLang="en-US" sz="1100" b="1">
+                <a:solidFill>
+                  <a:srgbClr val="146B58"/>
+                </a:solidFill>
+                <a:latin typeface="맑은 고딕" panose="020B0503020000020004" pitchFamily="50" charset="-127"/>
+              </a:rPr>
+              <a:t>증거 </a:t>
+            </a:r>
+            <a:r>
+              <a:rPr lang="en-US" altLang="ko-KR" sz="1100" b="1">
+                <a:solidFill>
+                  <a:srgbClr val="146B58"/>
+                </a:solidFill>
+                <a:latin typeface="맑은 고딕" panose="020B0503020000020004" pitchFamily="50" charset="-127"/>
+              </a:rPr>
+              <a:t>6/7 · C34~C35 · C78~C82</a:t>
+            </a:r>
+            <a:endParaRPr lang="ko-KR" altLang="en-US" sz="1100" b="1">
+              <a:solidFill>
+                <a:srgbClr val="146B58"/>
+              </a:solidFill>
+              <a:latin typeface="맑은 고딕" panose="020B0503020000020004" pitchFamily="50" charset="-127"/>
+            </a:endParaRPr>
+          </a:p>
+        </p:txBody>
+      </p:sp>
+      <p:sp>
+        <p:nvSpPr>
+          <p:cNvPr id="3" name="TextBox 2">
+            <a:extLst>
+              <a:ext uri="{FF2B5EF4-FFF2-40B4-BE49-F238E27FC236}">
+                <a16:creationId xmlns:a16="http://schemas.microsoft.com/office/drawing/2014/main" id="{F3DD24C0-5527-4139-AC2F-B13F9AFB7805}"/>
+              </a:ext>
+            </a:extLst>
+          </p:cNvPr>
+          <p:cNvSpPr txBox="1"/>
+          <p:nvPr/>
+        </p:nvSpPr>
+        <p:spPr>
+          <a:xfrm>
+            <a:off x="594360" y="658368"/>
+            <a:ext cx="8046720" cy="384721"/>
+          </a:xfrm>
+          <a:prstGeom prst="rect">
+            <a:avLst/>
+          </a:prstGeom>
+          <a:noFill/>
+        </p:spPr>
+        <p:txBody>
+          <a:bodyPr vert="horz" wrap="square" lIns="0" tIns="0" rIns="0" bIns="0" rtlCol="0">
+            <a:spAutoFit/>
+          </a:bodyPr>
+          <a:lstStyle/>
+          <a:p>
+            <a:r>
+              <a:rPr lang="en-US" altLang="ko-KR" sz="2500" b="1">
+                <a:solidFill>
+                  <a:srgbClr val="17372F"/>
+                </a:solidFill>
+                <a:latin typeface="맑은 고딕" panose="020B0503020000020004" pitchFamily="50" charset="-127"/>
+              </a:rPr>
+              <a:t>PC </a:t>
+            </a:r>
+            <a:r>
+              <a:rPr lang="ko-KR" altLang="en-US" sz="2500" b="1">
+                <a:solidFill>
+                  <a:srgbClr val="17372F"/>
+                </a:solidFill>
+                <a:latin typeface="맑은 고딕" panose="020B0503020000020004" pitchFamily="50" charset="-127"/>
+              </a:rPr>
+              <a:t>플래너와 공개 안내</a:t>
+            </a:r>
+          </a:p>
+        </p:txBody>
+      </p:sp>
+      <p:sp>
+        <p:nvSpPr>
+          <p:cNvPr id="4" name="TextBox 3">
+            <a:extLst>
+              <a:ext uri="{FF2B5EF4-FFF2-40B4-BE49-F238E27FC236}">
+                <a16:creationId xmlns:a16="http://schemas.microsoft.com/office/drawing/2014/main" id="{557C5986-6E2A-437D-91EE-7CEB7A63D7F3}"/>
+              </a:ext>
+            </a:extLst>
+          </p:cNvPr>
+          <p:cNvSpPr txBox="1"/>
+          <p:nvPr/>
+        </p:nvSpPr>
+        <p:spPr>
+          <a:xfrm>
+            <a:off x="594360" y="1078992"/>
+            <a:ext cx="10789920" cy="169277"/>
+          </a:xfrm>
+          <a:prstGeom prst="rect">
+            <a:avLst/>
+          </a:prstGeom>
+          <a:noFill/>
+        </p:spPr>
+        <p:txBody>
+          <a:bodyPr vert="horz" wrap="square" lIns="0" tIns="0" rIns="0" bIns="0" rtlCol="0">
+            <a:spAutoFit/>
+          </a:bodyPr>
+          <a:lstStyle/>
+          <a:p>
+            <a:r>
+              <a:rPr lang="ko-KR" altLang="en-US" sz="1100">
+                <a:solidFill>
+                  <a:srgbClr val="5F6F69"/>
+                </a:solidFill>
+                <a:latin typeface="맑은 고딕" panose="020B0503020000020004" pitchFamily="50" charset="-127"/>
+              </a:rPr>
+              <a:t>실제 </a:t>
+            </a:r>
+            <a:r>
+              <a:rPr lang="en-US" altLang="ko-KR" sz="1100">
+                <a:solidFill>
+                  <a:srgbClr val="5F6F69"/>
+                </a:solidFill>
+                <a:latin typeface="맑은 고딕" panose="020B0503020000020004" pitchFamily="50" charset="-127"/>
+              </a:rPr>
+              <a:t>DB </a:t>
+            </a:r>
+            <a:r>
+              <a:rPr lang="ko-KR" altLang="en-US" sz="1100">
+                <a:solidFill>
+                  <a:srgbClr val="5F6F69"/>
+                </a:solidFill>
+                <a:latin typeface="맑은 고딕" panose="020B0503020000020004" pitchFamily="50" charset="-127"/>
+              </a:rPr>
+              <a:t>자료</a:t>
+            </a:r>
+            <a:r>
+              <a:rPr lang="en-US" altLang="ko-KR" sz="1100">
+                <a:solidFill>
+                  <a:srgbClr val="5F6F69"/>
+                </a:solidFill>
+                <a:latin typeface="맑은 고딕" panose="020B0503020000020004" pitchFamily="50" charset="-127"/>
+              </a:rPr>
+              <a:t>, </a:t>
+            </a:r>
+            <a:r>
+              <a:rPr lang="ko-KR" altLang="en-US" sz="1100">
+                <a:solidFill>
+                  <a:srgbClr val="5F6F69"/>
+                </a:solidFill>
+                <a:latin typeface="맑은 고딕" panose="020B0503020000020004" pitchFamily="50" charset="-127"/>
+              </a:rPr>
+              <a:t>날짜</a:t>
+            </a:r>
+            <a:r>
+              <a:rPr lang="en-US" altLang="ko-KR" sz="1100">
+                <a:solidFill>
+                  <a:srgbClr val="5F6F69"/>
+                </a:solidFill>
+                <a:latin typeface="맑은 고딕" panose="020B0503020000020004" pitchFamily="50" charset="-127"/>
+              </a:rPr>
+              <a:t>·</a:t>
+            </a:r>
+            <a:r>
+              <a:rPr lang="ko-KR" altLang="en-US" sz="1100">
+                <a:solidFill>
+                  <a:srgbClr val="5F6F69"/>
+                </a:solidFill>
+                <a:latin typeface="맑은 고딕" panose="020B0503020000020004" pitchFamily="50" charset="-127"/>
+              </a:rPr>
+              <a:t>분 단위</a:t>
+            </a:r>
+            <a:r>
+              <a:rPr lang="en-US" altLang="ko-KR" sz="1100">
+                <a:solidFill>
+                  <a:srgbClr val="5F6F69"/>
+                </a:solidFill>
+                <a:latin typeface="맑은 고딕" panose="020B0503020000020004" pitchFamily="50" charset="-127"/>
+              </a:rPr>
+              <a:t>, </a:t>
+            </a:r>
+            <a:r>
+              <a:rPr lang="ko-KR" altLang="en-US" sz="1100">
+                <a:solidFill>
+                  <a:srgbClr val="5F6F69"/>
+                </a:solidFill>
+                <a:latin typeface="맑은 고딕" panose="020B0503020000020004" pitchFamily="50" charset="-127"/>
+              </a:rPr>
+              <a:t>플래너와 로그인 없는 공개 안내</a:t>
+            </a:r>
+          </a:p>
+        </p:txBody>
+      </p:sp>
+      <p:sp>
+        <p:nvSpPr>
+          <p:cNvPr id="7" name="TextBox 6">
+            <a:extLst>
+              <a:ext uri="{FF2B5EF4-FFF2-40B4-BE49-F238E27FC236}">
+                <a16:creationId xmlns:a16="http://schemas.microsoft.com/office/drawing/2014/main" id="{3E7E3C88-E527-444D-AEF6-CC5D1AD14D82}"/>
+              </a:ext>
+            </a:extLst>
+          </p:cNvPr>
+          <p:cNvSpPr txBox="1"/>
+          <p:nvPr/>
+        </p:nvSpPr>
+        <p:spPr>
+          <a:xfrm>
+            <a:off x="7818120" y="6446520"/>
+            <a:ext cx="3749040" cy="123111"/>
+          </a:xfrm>
+          <a:prstGeom prst="rect">
+            <a:avLst/>
+          </a:prstGeom>
+          <a:noFill/>
+        </p:spPr>
+        <p:txBody>
+          <a:bodyPr vert="horz" wrap="square" lIns="0" tIns="0" rIns="0" bIns="0" rtlCol="0">
+            <a:spAutoFit/>
+          </a:bodyPr>
+          <a:lstStyle/>
+          <a:p>
+            <a:r>
+              <a:rPr lang="en-US" altLang="ko-KR" sz="800">
+                <a:solidFill>
+                  <a:srgbClr val="5F6F69"/>
+                </a:solidFill>
+                <a:latin typeface="맑은 고딕" panose="020B0503020000020004" pitchFamily="50" charset="-127"/>
+              </a:rPr>
+              <a:t>1920×1080 PC </a:t>
+            </a:r>
+            <a:r>
+              <a:rPr lang="ko-KR" altLang="en-US" sz="800">
+                <a:solidFill>
+                  <a:srgbClr val="5F6F69"/>
+                </a:solidFill>
+                <a:latin typeface="맑은 고딕" panose="020B0503020000020004" pitchFamily="50" charset="-127"/>
+              </a:rPr>
+              <a:t>데스크톱 기준 </a:t>
+            </a:r>
+            <a:r>
+              <a:rPr lang="en-US" altLang="ko-KR" sz="800">
+                <a:solidFill>
+                  <a:srgbClr val="5F6F69"/>
+                </a:solidFill>
+                <a:latin typeface="맑은 고딕" panose="020B0503020000020004" pitchFamily="50" charset="-127"/>
+              </a:rPr>
+              <a:t>· 2026-09-01</a:t>
+            </a:r>
+            <a:endParaRPr lang="ko-KR" altLang="en-US" sz="800">
+              <a:solidFill>
+                <a:srgbClr val="5F6F69"/>
+              </a:solidFill>
+              <a:latin typeface="맑은 고딕" panose="020B0503020000020004" pitchFamily="50" charset="-127"/>
+            </a:endParaRPr>
+          </a:p>
+        </p:txBody>
+      </p:sp>
+      <p:pic>
+        <p:nvPicPr>
+          <p:cNvPr id="6" name="그림 5">
+            <a:extLst>
+              <a:ext uri="{FF2B5EF4-FFF2-40B4-BE49-F238E27FC236}">
+                <a16:creationId xmlns:a16="http://schemas.microsoft.com/office/drawing/2014/main" id="{37EDC3B0-29A2-43C6-BA01-777FCDC12AA8}"/>
+              </a:ext>
+            </a:extLst>
+          </p:cNvPr>
+          <p:cNvPicPr>
+            <a:picLocks/>
+          </p:cNvPicPr>
+          <p:nvPr/>
+        </p:nvPicPr>
+        <p:blipFill>
+          <a:blip r:embed="rId2"/>
+          <a:stretch>
+            <a:fillRect/>
+          </a:stretch>
+        </p:blipFill>
+        <p:spPr>
+          <a:xfrm>
+            <a:off x="2284000" y="1444752"/>
+            <a:ext cx="7620953" cy="4800600"/>
+          </a:xfrm>
+          <a:prstGeom prst="rect">
+            <a:avLst/>
+          </a:prstGeom>
+        </p:spPr>
+      </p:pic>
+    </p:spTree>
+    <p:extLst>
+      <p:ext uri="{BB962C8B-B14F-4D97-AF65-F5344CB8AC3E}">
+        <p14:creationId xmlns:p14="http://schemas.microsoft.com/office/powerpoint/2010/main" val="316489938"/>
+      </p:ext>
+    </p:extLst>
+  </p:cSld>
+  <p:clrMapOvr>
+    <a:masterClrMapping/>
+  </p:clrMapOvr>
+</p:sld>
+</file>
+
+<file path=ppt/slides/slide24.xml><?xml version="1.0" encoding="utf-8"?>
+<p:sld xmlns:a="http://schemas.openxmlformats.org/drawingml/2006/main" xmlns:r="http://schemas.openxmlformats.org/officeDocument/2006/relationships" xmlns:p="http://schemas.openxmlformats.org/presentationml/2006/main">
+  <p:cSld>
+    <p:bg>
+      <p:bgPr>
+        <a:solidFill>
+          <a:srgbClr val="FCFCF8"/>
+        </a:solidFill>
+        <a:effectLst/>
+      </p:bgPr>
+    </p:bg>
+    <p:spTree>
+      <p:nvGrpSpPr>
+        <p:cNvPr id="1" name=""/>
+        <p:cNvGrpSpPr/>
+        <p:nvPr/>
+      </p:nvGrpSpPr>
+      <p:grpSpPr>
+        <a:xfrm>
+          <a:off x="0" y="0"/>
+          <a:ext cx="0" cy="0"/>
+          <a:chOff x="0" y="0"/>
+          <a:chExt cx="0" cy="0"/>
+        </a:xfrm>
+      </p:grpSpPr>
+      <p:sp>
+        <p:nvSpPr>
+          <p:cNvPr id="2" name="TextBox 1">
+            <a:extLst>
+              <a:ext uri="{FF2B5EF4-FFF2-40B4-BE49-F238E27FC236}">
+                <a16:creationId xmlns:a16="http://schemas.microsoft.com/office/drawing/2014/main" id="{0E54521C-65EE-41C2-BB87-1FC056D29ADA}"/>
+              </a:ext>
+            </a:extLst>
+          </p:cNvPr>
+          <p:cNvSpPr txBox="1"/>
+          <p:nvPr/>
+        </p:nvSpPr>
+        <p:spPr>
+          <a:xfrm>
+            <a:off x="594360" y="347472"/>
+            <a:ext cx="3657600" cy="169277"/>
+          </a:xfrm>
+          <a:prstGeom prst="rect">
+            <a:avLst/>
+          </a:prstGeom>
+          <a:noFill/>
+        </p:spPr>
+        <p:txBody>
+          <a:bodyPr vert="horz" wrap="square" lIns="0" tIns="0" rIns="0" bIns="0" rtlCol="0">
+            <a:spAutoFit/>
+          </a:bodyPr>
+          <a:lstStyle/>
+          <a:p>
+            <a:r>
+              <a:rPr lang="en-US" altLang="ko-KR" sz="1100" b="1">
+                <a:solidFill>
+                  <a:srgbClr val="146B58"/>
+                </a:solidFill>
+                <a:latin typeface="맑은 고딕" panose="020B0503020000020004" pitchFamily="50" charset="-127"/>
+              </a:rPr>
+              <a:t>PC </a:t>
+            </a:r>
+            <a:r>
+              <a:rPr lang="ko-KR" altLang="en-US" sz="1100" b="1">
+                <a:solidFill>
+                  <a:srgbClr val="146B58"/>
+                </a:solidFill>
+                <a:latin typeface="맑은 고딕" panose="020B0503020000020004" pitchFamily="50" charset="-127"/>
+              </a:rPr>
+              <a:t>증거 </a:t>
+            </a:r>
+            <a:r>
+              <a:rPr lang="en-US" altLang="ko-KR" sz="1100" b="1">
+                <a:solidFill>
+                  <a:srgbClr val="146B58"/>
+                </a:solidFill>
+                <a:latin typeface="맑은 고딕" panose="020B0503020000020004" pitchFamily="50" charset="-127"/>
+              </a:rPr>
+              <a:t>7/7 · C57</a:t>
+            </a:r>
+            <a:endParaRPr lang="ko-KR" altLang="en-US" sz="1100" b="1">
+              <a:solidFill>
+                <a:srgbClr val="146B58"/>
+              </a:solidFill>
+              <a:latin typeface="맑은 고딕" panose="020B0503020000020004" pitchFamily="50" charset="-127"/>
+            </a:endParaRPr>
+          </a:p>
+        </p:txBody>
+      </p:sp>
+      <p:sp>
+        <p:nvSpPr>
+          <p:cNvPr id="3" name="TextBox 2">
+            <a:extLst>
+              <a:ext uri="{FF2B5EF4-FFF2-40B4-BE49-F238E27FC236}">
+                <a16:creationId xmlns:a16="http://schemas.microsoft.com/office/drawing/2014/main" id="{7D8A2B11-53F1-45BA-A1FB-B9F004835BFA}"/>
+              </a:ext>
+            </a:extLst>
+          </p:cNvPr>
+          <p:cNvSpPr txBox="1"/>
+          <p:nvPr/>
+        </p:nvSpPr>
+        <p:spPr>
+          <a:xfrm>
+            <a:off x="594360" y="658368"/>
+            <a:ext cx="8046720" cy="384721"/>
+          </a:xfrm>
+          <a:prstGeom prst="rect">
+            <a:avLst/>
+          </a:prstGeom>
+          <a:noFill/>
+        </p:spPr>
+        <p:txBody>
+          <a:bodyPr vert="horz" wrap="square" lIns="0" tIns="0" rIns="0" bIns="0" rtlCol="0">
+            <a:spAutoFit/>
+          </a:bodyPr>
+          <a:lstStyle/>
+          <a:p>
+            <a:r>
+              <a:rPr lang="ko-KR" altLang="en-US" sz="2500" b="1">
+                <a:solidFill>
+                  <a:srgbClr val="17372F"/>
+                </a:solidFill>
+                <a:latin typeface="맑은 고딕" panose="020B0503020000020004" pitchFamily="50" charset="-127"/>
+              </a:rPr>
+              <a:t>스크립트 문자 안전 표시</a:t>
+            </a:r>
+          </a:p>
+        </p:txBody>
+      </p:sp>
+      <p:sp>
+        <p:nvSpPr>
+          <p:cNvPr id="4" name="TextBox 3">
+            <a:extLst>
+              <a:ext uri="{FF2B5EF4-FFF2-40B4-BE49-F238E27FC236}">
+                <a16:creationId xmlns:a16="http://schemas.microsoft.com/office/drawing/2014/main" id="{6CEA20EA-0162-45A0-A149-7CBE998D16BC}"/>
+              </a:ext>
+            </a:extLst>
+          </p:cNvPr>
+          <p:cNvSpPr txBox="1"/>
+          <p:nvPr/>
+        </p:nvSpPr>
+        <p:spPr>
+          <a:xfrm>
+            <a:off x="594360" y="1078992"/>
+            <a:ext cx="10789920" cy="169277"/>
+          </a:xfrm>
+          <a:prstGeom prst="rect">
+            <a:avLst/>
+          </a:prstGeom>
+          <a:noFill/>
+        </p:spPr>
+        <p:txBody>
+          <a:bodyPr vert="horz" wrap="square" lIns="0" tIns="0" rIns="0" bIns="0" rtlCol="0">
+            <a:spAutoFit/>
+          </a:bodyPr>
+          <a:lstStyle/>
+          <a:p>
+            <a:r>
+              <a:rPr lang="ko-KR" altLang="en-US" sz="1100">
+                <a:solidFill>
+                  <a:srgbClr val="5F6F69"/>
+                </a:solidFill>
+                <a:latin typeface="맑은 고딕" panose="020B0503020000020004" pitchFamily="50" charset="-127"/>
+              </a:rPr>
+              <a:t>스크립트 모양 입력이 실행되지 않고 화면에 글자 그대로 표시</a:t>
+            </a:r>
+          </a:p>
+        </p:txBody>
+      </p:sp>
+      <p:sp>
+        <p:nvSpPr>
+          <p:cNvPr id="7" name="TextBox 6">
+            <a:extLst>
+              <a:ext uri="{FF2B5EF4-FFF2-40B4-BE49-F238E27FC236}">
+                <a16:creationId xmlns:a16="http://schemas.microsoft.com/office/drawing/2014/main" id="{4D47C170-9B7D-4F57-8551-609C0DA4EDF5}"/>
+              </a:ext>
+            </a:extLst>
+          </p:cNvPr>
+          <p:cNvSpPr txBox="1"/>
+          <p:nvPr/>
+        </p:nvSpPr>
+        <p:spPr>
+          <a:xfrm>
+            <a:off x="7818120" y="6446520"/>
+            <a:ext cx="3749040" cy="123111"/>
+          </a:xfrm>
+          <a:prstGeom prst="rect">
+            <a:avLst/>
+          </a:prstGeom>
+          <a:noFill/>
+        </p:spPr>
+        <p:txBody>
+          <a:bodyPr vert="horz" wrap="square" lIns="0" tIns="0" rIns="0" bIns="0" rtlCol="0">
+            <a:spAutoFit/>
+          </a:bodyPr>
+          <a:lstStyle/>
+          <a:p>
+            <a:r>
+              <a:rPr lang="en-US" altLang="ko-KR" sz="800">
+                <a:solidFill>
+                  <a:srgbClr val="5F6F69"/>
+                </a:solidFill>
+                <a:latin typeface="맑은 고딕" panose="020B0503020000020004" pitchFamily="50" charset="-127"/>
+              </a:rPr>
+              <a:t>1920×1080 PC </a:t>
+            </a:r>
+            <a:r>
+              <a:rPr lang="ko-KR" altLang="en-US" sz="800">
+                <a:solidFill>
+                  <a:srgbClr val="5F6F69"/>
+                </a:solidFill>
+                <a:latin typeface="맑은 고딕" panose="020B0503020000020004" pitchFamily="50" charset="-127"/>
+              </a:rPr>
+              <a:t>데스크톱 기준 </a:t>
+            </a:r>
+            <a:r>
+              <a:rPr lang="en-US" altLang="ko-KR" sz="800">
+                <a:solidFill>
+                  <a:srgbClr val="5F6F69"/>
+                </a:solidFill>
+                <a:latin typeface="맑은 고딕" panose="020B0503020000020004" pitchFamily="50" charset="-127"/>
+              </a:rPr>
+              <a:t>· 2026-09-01</a:t>
+            </a:r>
+            <a:endParaRPr lang="ko-KR" altLang="en-US" sz="800">
+              <a:solidFill>
+                <a:srgbClr val="5F6F69"/>
+              </a:solidFill>
+              <a:latin typeface="맑은 고딕" panose="020B0503020000020004" pitchFamily="50" charset="-127"/>
+            </a:endParaRPr>
+          </a:p>
+        </p:txBody>
+      </p:sp>
+      <p:pic>
+        <p:nvPicPr>
+          <p:cNvPr id="6" name="그림 5">
+            <a:extLst>
+              <a:ext uri="{FF2B5EF4-FFF2-40B4-BE49-F238E27FC236}">
+                <a16:creationId xmlns:a16="http://schemas.microsoft.com/office/drawing/2014/main" id="{646996D9-E7FC-44ED-89B2-772A4F92E371}"/>
+              </a:ext>
+            </a:extLst>
+          </p:cNvPr>
+          <p:cNvPicPr>
+            <a:picLocks/>
+          </p:cNvPicPr>
+          <p:nvPr/>
+        </p:nvPicPr>
+        <p:blipFill>
+          <a:blip r:embed="rId2"/>
+          <a:stretch>
+            <a:fillRect/>
+          </a:stretch>
+        </p:blipFill>
+        <p:spPr>
+          <a:xfrm>
+            <a:off x="2593273" y="1444752"/>
+            <a:ext cx="7002407" cy="4800600"/>
+          </a:xfrm>
+          <a:prstGeom prst="rect">
+            <a:avLst/>
+          </a:prstGeom>
+        </p:spPr>
+      </p:pic>
+    </p:spTree>
+    <p:extLst>
+      <p:ext uri="{BB962C8B-B14F-4D97-AF65-F5344CB8AC3E}">
+        <p14:creationId xmlns:p14="http://schemas.microsoft.com/office/powerpoint/2010/main" val="3726298046"/>
+      </p:ext>
+    </p:extLst>
+  </p:cSld>
+  <p:clrMapOvr>
+    <a:masterClrMapping/>
+  </p:clrMapOvr>
+</p:sld>
+</file>
+
+<file path=ppt/slides/slide25.xml><?xml version="1.0" encoding="utf-8"?>
+<p:sld xmlns:a="http://schemas.openxmlformats.org/drawingml/2006/main" xmlns:r="http://schemas.openxmlformats.org/officeDocument/2006/relationships" xmlns:p="http://schemas.openxmlformats.org/presentationml/2006/main">
+  <p:cSld name="Slide 15">
+    <p:bg>
+      <p:bgPr>
+        <a:solidFill>
+          <a:srgbClr val="17372F"/>
+        </a:solidFill>
+        <a:effectLst/>
+      </p:bgPr>
+    </p:bg>
+    <p:spTree>
+      <p:nvGrpSpPr>
+        <p:cNvPr id="1" name=""/>
+        <p:cNvGrpSpPr/>
+        <p:nvPr/>
+      </p:nvGrpSpPr>
+      <p:grpSpPr>
+        <a:xfrm>
+          <a:off x="0" y="0"/>
+          <a:ext cx="0" cy="0"/>
+          <a:chOff x="0" y="0"/>
+          <a:chExt cx="0" cy="0"/>
+        </a:xfrm>
+      </p:grpSpPr>
+      <p:sp>
+        <p:nvSpPr>
+          <p:cNvPr id="2" name="Text 0"/>
+          <p:cNvSpPr/>
+          <p:nvPr/>
+        </p:nvSpPr>
+        <p:spPr>
+          <a:xfrm>
+            <a:off x="685800" y="566928"/>
+            <a:ext cx="3108960" cy="237744"/>
+          </a:xfrm>
+          <a:prstGeom prst="rect">
+            <a:avLst/>
+          </a:prstGeom>
+          <a:noFill/>
+          <a:ln/>
+        </p:spPr>
+        <p:txBody>
+          <a:bodyPr wrap="square" lIns="0" tIns="0" rIns="0" bIns="0" rtlCol="0" anchor="ctr">
+            <a:normAutofit/>
+          </a:bodyPr>
+          <a:lstStyle/>
+          <a:p>
+            <a:pPr marL="0" indent="0">
+              <a:buNone/>
+            </a:pPr>
+            <a:r>
+              <a:rPr lang="en-US" sz="1050" b="1" kern="0" spc="220" dirty="0">
+                <a:solidFill>
+                  <a:srgbClr val="EACB8E"/>
+                </a:solidFill>
+                <a:latin typeface="Malgun Gothic" pitchFamily="34" charset="0"/>
+                <a:ea typeface="Malgun Gothic" pitchFamily="34" charset="-122"/>
+                <a:cs typeface="Malgun Gothic" pitchFamily="34" charset="-120"/>
+              </a:rPr>
+              <a:t>READY TO SUBMIT</a:t>
+            </a:r>
+            <a:endParaRPr lang="en-US" sz="1050" dirty="0"/>
+          </a:p>
+        </p:txBody>
+      </p:sp>
+      <p:sp>
+        <p:nvSpPr>
+          <p:cNvPr id="3" name="Text 1"/>
+          <p:cNvSpPr/>
+          <p:nvPr/>
+        </p:nvSpPr>
+        <p:spPr>
+          <a:xfrm>
+            <a:off x="658368" y="1005840"/>
+            <a:ext cx="5486400" cy="1143000"/>
+          </a:xfrm>
+          <a:prstGeom prst="rect">
+            <a:avLst/>
+          </a:prstGeom>
+          <a:noFill/>
+          <a:ln/>
+        </p:spPr>
+        <p:txBody>
+          <a:bodyPr wrap="square" lIns="0" tIns="0" rIns="0" bIns="0" rtlCol="0" anchor="t">
+            <a:normAutofit/>
+          </a:bodyPr>
+          <a:lstStyle/>
+          <a:p>
+            <a:pPr marL="0" indent="0">
+              <a:buNone/>
+            </a:pPr>
+            <a:r>
+              <a:rPr lang="en-US" sz="3400" b="1" dirty="0">
+                <a:solidFill>
+                  <a:srgbClr val="FFFFFF"/>
+                </a:solidFill>
+                <a:latin typeface="Malgun Gothic" pitchFamily="34" charset="0"/>
+                <a:ea typeface="Malgun Gothic" pitchFamily="34" charset="-122"/>
+                <a:cs typeface="Malgun Gothic" pitchFamily="34" charset="-120"/>
+              </a:rPr>
+              <a:t>플랜두씨 다이어리</a:t>
+            </a:r>
+            <a:endParaRPr lang="en-US" sz="3400" dirty="0"/>
+          </a:p>
+          <a:p>
+            <a:pPr marL="0" indent="0">
+              <a:buNone/>
+            </a:pPr>
+            <a:r>
+              <a:rPr lang="en-US" sz="3400" b="1" dirty="0">
+                <a:solidFill>
+                  <a:srgbClr val="FFFFFF"/>
+                </a:solidFill>
+                <a:latin typeface="Malgun Gothic" pitchFamily="34" charset="0"/>
+                <a:ea typeface="Malgun Gothic" pitchFamily="34" charset="-122"/>
+                <a:cs typeface="Malgun Gothic" pitchFamily="34" charset="-120"/>
+              </a:rPr>
+              <a:t>제출 준비 완료</a:t>
+            </a:r>
+            <a:endParaRPr lang="en-US" sz="3400" dirty="0"/>
+          </a:p>
+        </p:txBody>
+      </p:sp>
+      <p:sp>
+        <p:nvSpPr>
+          <p:cNvPr id="4" name="Text 2"/>
+          <p:cNvSpPr/>
+          <p:nvPr/>
+        </p:nvSpPr>
+        <p:spPr>
+          <a:xfrm>
+            <a:off x="713232" y="2487168"/>
+            <a:ext cx="914400" cy="201168"/>
+          </a:xfrm>
+          <a:prstGeom prst="rect">
+            <a:avLst/>
+          </a:prstGeom>
+          <a:noFill/>
+          <a:ln/>
+        </p:spPr>
+        <p:txBody>
+          <a:bodyPr wrap="square" lIns="0" tIns="0" rIns="0" bIns="0" rtlCol="0" anchor="ctr">
+            <a:normAutofit/>
+          </a:bodyPr>
+          <a:lstStyle/>
+          <a:p>
+            <a:pPr marL="0" indent="0">
+              <a:buNone/>
+            </a:pPr>
+            <a:r>
+              <a:rPr lang="en-US" sz="950" b="1" dirty="0">
+                <a:solidFill>
+                  <a:srgbClr val="EACB8E"/>
+                </a:solidFill>
+                <a:latin typeface="Malgun Gothic" pitchFamily="34" charset="0"/>
+                <a:ea typeface="Malgun Gothic" pitchFamily="34" charset="-122"/>
+                <a:cs typeface="Malgun Gothic" pitchFamily="34" charset="-120"/>
+              </a:rPr>
+              <a:t>결과물</a:t>
+            </a:r>
+            <a:endParaRPr lang="en-US" sz="950" dirty="0"/>
+          </a:p>
+        </p:txBody>
+      </p:sp>
+      <p:sp>
+        <p:nvSpPr>
+          <p:cNvPr id="5" name="Text 3"/>
+          <p:cNvSpPr/>
+          <p:nvPr/>
+        </p:nvSpPr>
+        <p:spPr>
+          <a:xfrm>
+            <a:off x="713232" y="2724912"/>
+            <a:ext cx="5486400" cy="347472"/>
+          </a:xfrm>
+          <a:prstGeom prst="rect">
+            <a:avLst/>
+          </a:prstGeom>
+          <a:noFill/>
+          <a:ln/>
+        </p:spPr>
+        <p:txBody>
+          <a:bodyPr wrap="square" lIns="0" tIns="0" rIns="0" bIns="0" rtlCol="0" anchor="ctr">
+            <a:normAutofit/>
+          </a:bodyPr>
+          <a:lstStyle/>
+          <a:p>
+            <a:pPr marL="0" indent="0">
+              <a:buNone/>
+            </a:pPr>
+            <a:r>
+              <a:rPr lang="en-US" sz="1600" b="1" u="sng" dirty="0">
+                <a:solidFill>
+                  <a:srgbClr val="FFFFFF"/>
+                </a:solidFill>
+                <a:latin typeface="Malgun Gothic" pitchFamily="34" charset="0"/>
+                <a:ea typeface="Malgun Gothic" pitchFamily="34" charset="-122"/>
+                <a:cs typeface="Malgun Gothic" pitchFamily="34" charset="-120"/>
+                <a:hlinkClick r:id="rId3">
+                  <a:extLst>
+                    <a:ext uri="{A12FA001-AC4F-418D-AE19-62706E023703}">
+                      <ahyp:hlinkClr xmlns:ahyp="http://schemas.microsoft.com/office/drawing/2018/hyperlinkcolor" val="tx"/>
+                    </a:ext>
+                  </a:extLst>
+                </a:hlinkClick>
+              </a:rPr>
+              <a:t>https://plan-do-see-diary.vercel.app</a:t>
+            </a:r>
+            <a:endParaRPr lang="en-US" sz="1600" dirty="0"/>
+          </a:p>
+        </p:txBody>
+      </p:sp>
+      <p:sp>
+        <p:nvSpPr>
+          <p:cNvPr id="6" name="Text 4"/>
+          <p:cNvSpPr/>
+          <p:nvPr/>
+        </p:nvSpPr>
+        <p:spPr>
+          <a:xfrm>
+            <a:off x="713232" y="3273552"/>
+            <a:ext cx="914400" cy="201168"/>
+          </a:xfrm>
+          <a:prstGeom prst="rect">
+            <a:avLst/>
+          </a:prstGeom>
+          <a:noFill/>
+          <a:ln/>
+        </p:spPr>
+        <p:txBody>
+          <a:bodyPr wrap="square" lIns="0" tIns="0" rIns="0" bIns="0" rtlCol="0" anchor="ctr">
+            <a:normAutofit/>
+          </a:bodyPr>
+          <a:lstStyle/>
+          <a:p>
+            <a:pPr marL="0" indent="0">
+              <a:buNone/>
+            </a:pPr>
+            <a:r>
+              <a:rPr lang="en-US" sz="950" b="1" dirty="0">
+                <a:solidFill>
+                  <a:srgbClr val="EACB8E"/>
+                </a:solidFill>
+                <a:latin typeface="Malgun Gothic" pitchFamily="34" charset="0"/>
+                <a:ea typeface="Malgun Gothic" pitchFamily="34" charset="-122"/>
+                <a:cs typeface="Malgun Gothic" pitchFamily="34" charset="-120"/>
+              </a:rPr>
+              <a:t>GitHub</a:t>
+            </a:r>
+            <a:endParaRPr lang="en-US" sz="950" dirty="0"/>
+          </a:p>
+        </p:txBody>
+      </p:sp>
+      <p:sp>
+        <p:nvSpPr>
+          <p:cNvPr id="7" name="Text 5"/>
+          <p:cNvSpPr/>
+          <p:nvPr/>
+        </p:nvSpPr>
+        <p:spPr>
+          <a:xfrm>
+            <a:off x="713232" y="3511296"/>
+            <a:ext cx="5486400" cy="347472"/>
+          </a:xfrm>
+          <a:prstGeom prst="rect">
+            <a:avLst/>
+          </a:prstGeom>
+          <a:noFill/>
+          <a:ln/>
+        </p:spPr>
+        <p:txBody>
+          <a:bodyPr wrap="square" lIns="0" tIns="0" rIns="0" bIns="0" rtlCol="0" anchor="ctr">
+            <a:normAutofit/>
+          </a:bodyPr>
+          <a:lstStyle/>
+          <a:p>
+            <a:pPr marL="0" indent="0">
+              <a:buNone/>
+            </a:pPr>
+            <a:r>
+              <a:rPr lang="en-US" sz="1600" b="1" u="sng" dirty="0">
+                <a:solidFill>
+                  <a:srgbClr val="FFFFFF"/>
+                </a:solidFill>
+                <a:latin typeface="Malgun Gothic" pitchFamily="34" charset="0"/>
+                <a:ea typeface="Malgun Gothic" pitchFamily="34" charset="-122"/>
+                <a:cs typeface="Malgun Gothic" pitchFamily="34" charset="-120"/>
+                <a:hlinkClick r:id="rId4">
+                  <a:extLst>
+                    <a:ext uri="{A12FA001-AC4F-418D-AE19-62706E023703}">
+                      <ahyp:hlinkClr xmlns:ahyp="http://schemas.microsoft.com/office/drawing/2018/hyperlinkcolor" val="tx"/>
+                    </a:ext>
+                  </a:extLst>
+                </a:hlinkClick>
+              </a:rPr>
+              <a:t>github.com/stulss/plan-do-see-diary</a:t>
+            </a:r>
+            <a:endParaRPr lang="en-US" sz="1600" dirty="0"/>
+          </a:p>
+        </p:txBody>
+      </p:sp>
+      <p:sp>
+        <p:nvSpPr>
+          <p:cNvPr id="8" name="Text 6"/>
+          <p:cNvSpPr/>
+          <p:nvPr/>
+        </p:nvSpPr>
+        <p:spPr>
+          <a:xfrm>
+            <a:off x="713232" y="4059936"/>
+            <a:ext cx="1371600" cy="201168"/>
+          </a:xfrm>
+          <a:prstGeom prst="rect">
+            <a:avLst/>
+          </a:prstGeom>
+          <a:noFill/>
+          <a:ln/>
+        </p:spPr>
+        <p:txBody>
+          <a:bodyPr wrap="square" lIns="0" tIns="0" rIns="0" bIns="0" rtlCol="0" anchor="ctr">
+            <a:normAutofit/>
+          </a:bodyPr>
+          <a:lstStyle/>
+          <a:p>
+            <a:pPr marL="0" indent="0">
+              <a:buNone/>
+            </a:pPr>
+            <a:r>
+              <a:rPr lang="en-US" sz="950" b="1" dirty="0">
+                <a:solidFill>
+                  <a:srgbClr val="EACB8E"/>
+                </a:solidFill>
+                <a:latin typeface="Malgun Gothic" pitchFamily="34" charset="0"/>
+                <a:ea typeface="Malgun Gothic" pitchFamily="34" charset="-122"/>
+                <a:cs typeface="Malgun Gothic" pitchFamily="34" charset="-120"/>
+              </a:rPr>
+              <a:t>40자리 고정 소스</a:t>
+            </a:r>
+            <a:endParaRPr lang="en-US" sz="950" dirty="0"/>
+          </a:p>
+        </p:txBody>
+      </p:sp>
+      <p:sp>
+        <p:nvSpPr>
+          <p:cNvPr id="10" name="Shape 8"/>
+          <p:cNvSpPr/>
+          <p:nvPr/>
+        </p:nvSpPr>
+        <p:spPr>
+          <a:xfrm>
+            <a:off x="6629400" y="960120"/>
+            <a:ext cx="4800600" cy="4480560"/>
+          </a:xfrm>
+          <a:prstGeom prst="roundRect">
+            <a:avLst>
+              <a:gd name="adj" fmla="val 1633"/>
+            </a:avLst>
+          </a:prstGeom>
+          <a:solidFill>
+            <a:srgbClr val="23483E"/>
+          </a:solidFill>
+          <a:ln w="12700">
+            <a:solidFill>
+              <a:srgbClr val="315A4E"/>
+            </a:solidFill>
+            <a:prstDash val="solid"/>
+          </a:ln>
+        </p:spPr>
+      </p:sp>
+      <p:sp>
+        <p:nvSpPr>
+          <p:cNvPr id="11" name="Text 9"/>
+          <p:cNvSpPr/>
+          <p:nvPr/>
+        </p:nvSpPr>
+        <p:spPr>
+          <a:xfrm>
+            <a:off x="6967728" y="1298448"/>
+            <a:ext cx="1828800" cy="329184"/>
+          </a:xfrm>
+          <a:prstGeom prst="rect">
+            <a:avLst/>
+          </a:prstGeom>
+          <a:noFill/>
+          <a:ln/>
+        </p:spPr>
+        <p:txBody>
+          <a:bodyPr wrap="square" lIns="0" tIns="0" rIns="0" bIns="0" rtlCol="0" anchor="ctr">
+            <a:normAutofit/>
+          </a:bodyPr>
+          <a:lstStyle/>
+          <a:p>
+            <a:pPr marL="0" indent="0">
+              <a:buNone/>
+            </a:pPr>
+            <a:r>
+              <a:rPr lang="en-US" sz="2100" b="1" dirty="0">
+                <a:solidFill>
+                  <a:srgbClr val="FFFFFF"/>
+                </a:solidFill>
+                <a:latin typeface="Malgun Gothic" pitchFamily="34" charset="0"/>
+                <a:ea typeface="Malgun Gothic" pitchFamily="34" charset="-122"/>
+                <a:cs typeface="Malgun Gothic" pitchFamily="34" charset="-120"/>
+              </a:rPr>
+              <a:t>30초 확인</a:t>
+            </a:r>
+            <a:endParaRPr lang="en-US" sz="2100" dirty="0"/>
+          </a:p>
+        </p:txBody>
+      </p:sp>
+      <p:sp>
+        <p:nvSpPr>
+          <p:cNvPr id="12" name="Shape 10"/>
+          <p:cNvSpPr/>
+          <p:nvPr/>
+        </p:nvSpPr>
+        <p:spPr>
+          <a:xfrm>
+            <a:off x="6967728" y="1874520"/>
+            <a:ext cx="411480" cy="411480"/>
+          </a:xfrm>
+          <a:prstGeom prst="ellipse">
+            <a:avLst/>
+          </a:prstGeom>
+          <a:solidFill>
+            <a:srgbClr val="146B58"/>
+          </a:solidFill>
+          <a:ln w="12700">
+            <a:solidFill>
+              <a:srgbClr val="146B58"/>
+            </a:solidFill>
+            <a:prstDash val="solid"/>
+          </a:ln>
+        </p:spPr>
+      </p:sp>
+      <p:sp>
+        <p:nvSpPr>
+          <p:cNvPr id="13" name="Text 11"/>
+          <p:cNvSpPr/>
+          <p:nvPr/>
+        </p:nvSpPr>
+        <p:spPr>
+          <a:xfrm>
+            <a:off x="6967728" y="1892808"/>
+            <a:ext cx="411480" cy="347472"/>
+          </a:xfrm>
+          <a:prstGeom prst="rect">
+            <a:avLst/>
+          </a:prstGeom>
+          <a:noFill/>
+          <a:ln/>
+        </p:spPr>
+        <p:txBody>
+          <a:bodyPr wrap="square" lIns="0" tIns="0" rIns="0" bIns="0" rtlCol="0" anchor="ctr">
+            <a:normAutofit/>
+          </a:bodyPr>
+          <a:lstStyle/>
+          <a:p>
+            <a:pPr marL="0" indent="0" algn="ctr">
+              <a:buNone/>
+            </a:pPr>
+            <a:r>
+              <a:rPr lang="en-US" sz="1100" b="1" dirty="0">
+                <a:solidFill>
+                  <a:srgbClr val="FFFFFF"/>
+                </a:solidFill>
+                <a:latin typeface="Malgun Gothic" pitchFamily="34" charset="0"/>
+                <a:ea typeface="Malgun Gothic" pitchFamily="34" charset="-122"/>
+                <a:cs typeface="Malgun Gothic" pitchFamily="34" charset="-120"/>
+              </a:rPr>
+              <a:t>1</a:t>
+            </a:r>
+            <a:endParaRPr lang="en-US" sz="1100" dirty="0"/>
+          </a:p>
+        </p:txBody>
+      </p:sp>
+      <p:sp>
+        <p:nvSpPr>
+          <p:cNvPr id="14" name="Text 12"/>
+          <p:cNvSpPr/>
+          <p:nvPr/>
+        </p:nvSpPr>
+        <p:spPr>
+          <a:xfrm>
+            <a:off x="7571232" y="1874520"/>
+            <a:ext cx="3456432" cy="420624"/>
+          </a:xfrm>
+          <a:prstGeom prst="rect">
+            <a:avLst/>
+          </a:prstGeom>
+          <a:noFill/>
+          <a:ln/>
+        </p:spPr>
+        <p:txBody>
+          <a:bodyPr wrap="square" lIns="0" tIns="0" rIns="0" bIns="0" rtlCol="0" anchor="ctr">
+            <a:normAutofit/>
+          </a:bodyPr>
+          <a:lstStyle/>
+          <a:p>
+            <a:pPr marL="0" indent="0">
+              <a:buNone/>
+            </a:pPr>
+            <a:r>
+              <a:rPr lang="en-US" sz="1300" dirty="0">
+                <a:solidFill>
+                  <a:srgbClr val="E3F0EB"/>
+                </a:solidFill>
+                <a:latin typeface="Malgun Gothic" pitchFamily="34" charset="0"/>
+                <a:ea typeface="Malgun Gothic" pitchFamily="34" charset="-122"/>
+                <a:cs typeface="Malgun Gothic" pitchFamily="34" charset="-120"/>
+              </a:rPr>
+              <a:t>결과물 주소를 로그인 없이 연다</a:t>
+            </a:r>
+            <a:endParaRPr lang="en-US" sz="1300" dirty="0"/>
+          </a:p>
+        </p:txBody>
+      </p:sp>
+      <p:sp>
+        <p:nvSpPr>
+          <p:cNvPr id="15" name="Shape 13"/>
+          <p:cNvSpPr/>
+          <p:nvPr/>
+        </p:nvSpPr>
+        <p:spPr>
+          <a:xfrm>
+            <a:off x="6967728" y="2624328"/>
+            <a:ext cx="411480" cy="411480"/>
+          </a:xfrm>
+          <a:prstGeom prst="ellipse">
+            <a:avLst/>
+          </a:prstGeom>
+          <a:solidFill>
+            <a:srgbClr val="146B58"/>
+          </a:solidFill>
+          <a:ln w="12700">
+            <a:solidFill>
+              <a:srgbClr val="146B58"/>
+            </a:solidFill>
+            <a:prstDash val="solid"/>
+          </a:ln>
+        </p:spPr>
+      </p:sp>
+      <p:sp>
+        <p:nvSpPr>
+          <p:cNvPr id="16" name="Text 14"/>
+          <p:cNvSpPr/>
+          <p:nvPr/>
+        </p:nvSpPr>
+        <p:spPr>
+          <a:xfrm>
+            <a:off x="6967728" y="2642616"/>
+            <a:ext cx="411480" cy="347472"/>
+          </a:xfrm>
+          <a:prstGeom prst="rect">
+            <a:avLst/>
+          </a:prstGeom>
+          <a:noFill/>
+          <a:ln/>
+        </p:spPr>
+        <p:txBody>
+          <a:bodyPr wrap="square" lIns="0" tIns="0" rIns="0" bIns="0" rtlCol="0" anchor="ctr">
+            <a:normAutofit/>
+          </a:bodyPr>
+          <a:lstStyle/>
+          <a:p>
+            <a:pPr marL="0" indent="0" algn="ctr">
+              <a:buNone/>
+            </a:pPr>
+            <a:r>
+              <a:rPr lang="en-US" sz="1100" b="1" dirty="0">
+                <a:solidFill>
+                  <a:srgbClr val="FFFFFF"/>
+                </a:solidFill>
+                <a:latin typeface="Malgun Gothic" pitchFamily="34" charset="0"/>
+                <a:ea typeface="Malgun Gothic" pitchFamily="34" charset="-122"/>
+                <a:cs typeface="Malgun Gothic" pitchFamily="34" charset="-120"/>
+              </a:rPr>
+              <a:t>2</a:t>
+            </a:r>
+            <a:endParaRPr lang="en-US" sz="1100" dirty="0"/>
+          </a:p>
+        </p:txBody>
+      </p:sp>
+      <p:sp>
+        <p:nvSpPr>
+          <p:cNvPr id="17" name="Text 15"/>
+          <p:cNvSpPr/>
+          <p:nvPr/>
+        </p:nvSpPr>
+        <p:spPr>
+          <a:xfrm>
+            <a:off x="7571232" y="2624328"/>
+            <a:ext cx="3456432" cy="420624"/>
+          </a:xfrm>
+          <a:prstGeom prst="rect">
+            <a:avLst/>
+          </a:prstGeom>
+          <a:noFill/>
+          <a:ln/>
+        </p:spPr>
+        <p:txBody>
+          <a:bodyPr wrap="square" lIns="0" tIns="0" rIns="0" bIns="0" rtlCol="0" anchor="ctr">
+            <a:normAutofit/>
+          </a:bodyPr>
+          <a:lstStyle/>
+          <a:p>
+            <a:pPr marL="0" indent="0">
+              <a:buNone/>
+            </a:pPr>
+            <a:r>
+              <a:rPr lang="en-US" sz="1300" dirty="0">
+                <a:solidFill>
+                  <a:srgbClr val="E3F0EB"/>
+                </a:solidFill>
+                <a:latin typeface="Malgun Gothic" pitchFamily="34" charset="0"/>
+                <a:ea typeface="Malgun Gothic" pitchFamily="34" charset="-122"/>
+                <a:cs typeface="Malgun Gothic" pitchFamily="34" charset="-120"/>
+              </a:rPr>
+              <a:t>완료 버튼을 연속으로 누른다</a:t>
+            </a:r>
+            <a:endParaRPr lang="en-US" sz="1300" dirty="0"/>
+          </a:p>
+        </p:txBody>
+      </p:sp>
+      <p:sp>
+        <p:nvSpPr>
+          <p:cNvPr id="18" name="Shape 16"/>
+          <p:cNvSpPr/>
+          <p:nvPr/>
+        </p:nvSpPr>
+        <p:spPr>
+          <a:xfrm>
+            <a:off x="6967728" y="3374136"/>
+            <a:ext cx="411480" cy="411480"/>
+          </a:xfrm>
+          <a:prstGeom prst="ellipse">
+            <a:avLst/>
+          </a:prstGeom>
+          <a:solidFill>
+            <a:srgbClr val="146B58"/>
+          </a:solidFill>
+          <a:ln w="12700">
+            <a:solidFill>
+              <a:srgbClr val="146B58"/>
+            </a:solidFill>
+            <a:prstDash val="solid"/>
+          </a:ln>
+        </p:spPr>
+      </p:sp>
+      <p:sp>
+        <p:nvSpPr>
+          <p:cNvPr id="19" name="Text 17"/>
+          <p:cNvSpPr/>
+          <p:nvPr/>
+        </p:nvSpPr>
+        <p:spPr>
+          <a:xfrm>
+            <a:off x="6967728" y="3392424"/>
+            <a:ext cx="411480" cy="347472"/>
+          </a:xfrm>
+          <a:prstGeom prst="rect">
+            <a:avLst/>
+          </a:prstGeom>
+          <a:noFill/>
+          <a:ln/>
+        </p:spPr>
+        <p:txBody>
+          <a:bodyPr wrap="square" lIns="0" tIns="0" rIns="0" bIns="0" rtlCol="0" anchor="ctr">
+            <a:normAutofit/>
+          </a:bodyPr>
+          <a:lstStyle/>
+          <a:p>
+            <a:pPr marL="0" indent="0" algn="ctr">
+              <a:buNone/>
+            </a:pPr>
+            <a:r>
+              <a:rPr lang="en-US" sz="1100" b="1" dirty="0">
+                <a:solidFill>
+                  <a:srgbClr val="FFFFFF"/>
+                </a:solidFill>
+                <a:latin typeface="Malgun Gothic" pitchFamily="34" charset="0"/>
+                <a:ea typeface="Malgun Gothic" pitchFamily="34" charset="-122"/>
+                <a:cs typeface="Malgun Gothic" pitchFamily="34" charset="-120"/>
+              </a:rPr>
+              <a:t>3</a:t>
+            </a:r>
+            <a:endParaRPr lang="en-US" sz="1100" dirty="0"/>
+          </a:p>
+        </p:txBody>
+      </p:sp>
+      <p:sp>
+        <p:nvSpPr>
+          <p:cNvPr id="20" name="Text 18"/>
+          <p:cNvSpPr/>
+          <p:nvPr/>
+        </p:nvSpPr>
+        <p:spPr>
+          <a:xfrm>
+            <a:off x="7571232" y="3374136"/>
+            <a:ext cx="3456432" cy="420624"/>
+          </a:xfrm>
+          <a:prstGeom prst="rect">
+            <a:avLst/>
+          </a:prstGeom>
+          <a:noFill/>
+          <a:ln/>
+        </p:spPr>
+        <p:txBody>
+          <a:bodyPr wrap="square" lIns="0" tIns="0" rIns="0" bIns="0" rtlCol="0" anchor="ctr">
+            <a:normAutofit/>
+          </a:bodyPr>
+          <a:lstStyle/>
+          <a:p>
+            <a:pPr marL="0" indent="0">
+              <a:buNone/>
+            </a:pPr>
+            <a:r>
+              <a:rPr lang="en-US" sz="1300" dirty="0">
+                <a:solidFill>
+                  <a:srgbClr val="E3F0EB"/>
+                </a:solidFill>
+                <a:latin typeface="Malgun Gothic" pitchFamily="34" charset="0"/>
+                <a:ea typeface="Malgun Gothic" pitchFamily="34" charset="-122"/>
+                <a:cs typeface="Malgun Gothic" pitchFamily="34" charset="-120"/>
+              </a:rPr>
+              <a:t>돌아보기의 완료 수를 클릭한다</a:t>
+            </a:r>
+            <a:endParaRPr lang="en-US" sz="1300" dirty="0"/>
+          </a:p>
+        </p:txBody>
+      </p:sp>
+      <p:sp>
+        <p:nvSpPr>
+          <p:cNvPr id="21" name="Shape 19"/>
+          <p:cNvSpPr/>
+          <p:nvPr/>
+        </p:nvSpPr>
+        <p:spPr>
+          <a:xfrm>
+            <a:off x="6967728" y="4123944"/>
+            <a:ext cx="411480" cy="411480"/>
+          </a:xfrm>
+          <a:prstGeom prst="ellipse">
+            <a:avLst/>
+          </a:prstGeom>
+          <a:solidFill>
+            <a:srgbClr val="C58B2A"/>
+          </a:solidFill>
+          <a:ln w="12700">
+            <a:solidFill>
+              <a:srgbClr val="C58B2A"/>
+            </a:solidFill>
+            <a:prstDash val="solid"/>
+          </a:ln>
+        </p:spPr>
+      </p:sp>
+      <p:sp>
+        <p:nvSpPr>
+          <p:cNvPr id="22" name="Text 20"/>
+          <p:cNvSpPr/>
+          <p:nvPr/>
+        </p:nvSpPr>
+        <p:spPr>
+          <a:xfrm>
+            <a:off x="6967728" y="4142232"/>
+            <a:ext cx="411480" cy="347472"/>
+          </a:xfrm>
+          <a:prstGeom prst="rect">
+            <a:avLst/>
+          </a:prstGeom>
+          <a:noFill/>
+          <a:ln/>
+        </p:spPr>
+        <p:txBody>
+          <a:bodyPr wrap="square" lIns="0" tIns="0" rIns="0" bIns="0" rtlCol="0" anchor="ctr">
+            <a:normAutofit/>
+          </a:bodyPr>
+          <a:lstStyle/>
+          <a:p>
+            <a:pPr marL="0" indent="0" algn="ctr">
+              <a:buNone/>
+            </a:pPr>
+            <a:r>
+              <a:rPr lang="en-US" sz="1100" b="1" dirty="0">
+                <a:solidFill>
+                  <a:srgbClr val="FFFFFF"/>
+                </a:solidFill>
+                <a:latin typeface="Malgun Gothic" pitchFamily="34" charset="0"/>
+                <a:ea typeface="Malgun Gothic" pitchFamily="34" charset="-122"/>
+                <a:cs typeface="Malgun Gothic" pitchFamily="34" charset="-120"/>
+              </a:rPr>
+              <a:t>✓</a:t>
+            </a:r>
+            <a:endParaRPr lang="en-US" sz="1100" dirty="0"/>
+          </a:p>
+        </p:txBody>
+      </p:sp>
+      <p:sp>
+        <p:nvSpPr>
+          <p:cNvPr id="23" name="Text 21"/>
+          <p:cNvSpPr/>
+          <p:nvPr/>
+        </p:nvSpPr>
+        <p:spPr>
+          <a:xfrm>
+            <a:off x="7571232" y="4123944"/>
+            <a:ext cx="3456432" cy="420624"/>
+          </a:xfrm>
+          <a:prstGeom prst="rect">
+            <a:avLst/>
+          </a:prstGeom>
+          <a:noFill/>
+          <a:ln/>
+        </p:spPr>
+        <p:txBody>
+          <a:bodyPr wrap="square" lIns="0" tIns="0" rIns="0" bIns="0" rtlCol="0" anchor="ctr">
+            <a:normAutofit/>
+          </a:bodyPr>
+          <a:lstStyle/>
+          <a:p>
+            <a:pPr marL="0" indent="0">
+              <a:buNone/>
+            </a:pPr>
+            <a:r>
+              <a:rPr lang="en-US" sz="1300" b="1" dirty="0">
+                <a:solidFill>
+                  <a:srgbClr val="F4D69A"/>
+                </a:solidFill>
+                <a:latin typeface="Malgun Gothic" pitchFamily="34" charset="0"/>
+                <a:ea typeface="Malgun Gothic" pitchFamily="34" charset="-122"/>
+                <a:cs typeface="Malgun Gothic" pitchFamily="34" charset="-120"/>
+              </a:rPr>
+              <a:t>완료 +1, 근거 목록 건수 일치</a:t>
+            </a:r>
+            <a:endParaRPr lang="en-US" sz="1300" dirty="0"/>
+          </a:p>
+        </p:txBody>
+      </p:sp>
+      <p:sp>
+        <p:nvSpPr>
+          <p:cNvPr id="24" name="Shape 22"/>
+          <p:cNvSpPr/>
+          <p:nvPr/>
+        </p:nvSpPr>
+        <p:spPr>
+          <a:xfrm>
+            <a:off x="6995160" y="4892040"/>
+            <a:ext cx="1965960" cy="310896"/>
+          </a:xfrm>
+          <a:prstGeom prst="roundRect">
+            <a:avLst/>
+          </a:prstGeom>
+          <a:solidFill>
+            <a:srgbClr val="C58B2A"/>
+          </a:solidFill>
+          <a:ln w="12700">
+            <a:solidFill>
+              <a:srgbClr val="C58B2A"/>
+            </a:solidFill>
+            <a:prstDash val="solid"/>
+          </a:ln>
+        </p:spPr>
+      </p:sp>
+      <p:sp>
+        <p:nvSpPr>
+          <p:cNvPr id="25" name="Text 23"/>
+          <p:cNvSpPr/>
+          <p:nvPr/>
+        </p:nvSpPr>
+        <p:spPr>
+          <a:xfrm>
+            <a:off x="6995160" y="4905756"/>
+            <a:ext cx="1965960" cy="274320"/>
+          </a:xfrm>
+          <a:prstGeom prst="rect">
+            <a:avLst/>
+          </a:prstGeom>
+          <a:noFill/>
+          <a:ln/>
+        </p:spPr>
+        <p:txBody>
+          <a:bodyPr wrap="square" lIns="0" tIns="0" rIns="0" bIns="0" rtlCol="0" anchor="ctr">
+            <a:normAutofit/>
+          </a:bodyPr>
+          <a:lstStyle/>
+          <a:p>
+            <a:pPr marL="0" indent="0" algn="ctr">
+              <a:buNone/>
+            </a:pPr>
+            <a:r>
+              <a:rPr lang="en-US" sz="1050" b="1" dirty="0">
+                <a:solidFill>
+                  <a:srgbClr val="FFFFFF"/>
+                </a:solidFill>
+                <a:latin typeface="Malgun Gothic" pitchFamily="34" charset="0"/>
+                <a:ea typeface="Malgun Gothic" pitchFamily="34" charset="-122"/>
+                <a:cs typeface="Malgun Gothic" pitchFamily="34" charset="-120"/>
+              </a:rPr>
+              <a:t>P0–P7 COMPLETE</a:t>
+            </a:r>
+            <a:endParaRPr lang="en-US" sz="1050" dirty="0"/>
+          </a:p>
+        </p:txBody>
+      </p:sp>
+      <p:sp>
+        <p:nvSpPr>
+          <p:cNvPr id="26" name="Text 24"/>
+          <p:cNvSpPr/>
+          <p:nvPr/>
+        </p:nvSpPr>
+        <p:spPr>
+          <a:xfrm>
+            <a:off x="713232" y="6035040"/>
+            <a:ext cx="5394960" cy="292608"/>
+          </a:xfrm>
+          <a:prstGeom prst="rect">
+            <a:avLst/>
+          </a:prstGeom>
+          <a:noFill/>
+          <a:ln/>
+        </p:spPr>
+        <p:txBody>
+          <a:bodyPr wrap="square" lIns="0" tIns="0" rIns="0" bIns="0" rtlCol="0" anchor="ctr">
+            <a:normAutofit/>
+          </a:bodyPr>
+          <a:lstStyle/>
+          <a:p>
+            <a:pPr marL="0" indent="0">
+              <a:buNone/>
+            </a:pPr>
+            <a:r>
+              <a:rPr lang="en-US" sz="1600" b="1" dirty="0">
+                <a:solidFill>
+                  <a:srgbClr val="AAC6BD"/>
+                </a:solidFill>
+                <a:latin typeface="Malgun Gothic" pitchFamily="34" charset="0"/>
+                <a:ea typeface="Malgun Gothic" pitchFamily="34" charset="-122"/>
+                <a:cs typeface="Malgun Gothic" pitchFamily="34" charset="-120"/>
+              </a:rPr>
+              <a:t>Plan → Do → See → Next Plan</a:t>
+            </a:r>
+            <a:endParaRPr lang="en-US" sz="1600" dirty="0"/>
+          </a:p>
+        </p:txBody>
+      </p:sp>
+      <p:sp>
+        <p:nvSpPr>
+          <p:cNvPr id="28" name="TextBox 27">
+            <a:extLst>
+              <a:ext uri="{FF2B5EF4-FFF2-40B4-BE49-F238E27FC236}">
+                <a16:creationId xmlns:a16="http://schemas.microsoft.com/office/drawing/2014/main" id="{BC773165-256B-4BCF-8395-365A017A4CE3}"/>
+              </a:ext>
+            </a:extLst>
+          </p:cNvPr>
+          <p:cNvSpPr txBox="1"/>
+          <p:nvPr/>
+        </p:nvSpPr>
+        <p:spPr>
+          <a:xfrm>
+            <a:off x="713232" y="4320571"/>
+            <a:ext cx="6097022" cy="507831"/>
+          </a:xfrm>
+          <a:prstGeom prst="rect">
+            <a:avLst/>
+          </a:prstGeom>
+          <a:noFill/>
+          <a:ln/>
+        </p:spPr>
+        <p:txBody>
+          <a:bodyPr wrap="square" lIns="0" tIns="0" rIns="0" bIns="0" rtlCol="0" anchor="ctr">
+            <a:normAutofit/>
+          </a:bodyPr>
+          <a:lstStyle>
+            <a:lvl1pPr indent="0">
+              <a:buNone/>
+              <a:defRPr sz="1350" b="1" u="sng">
+                <a:solidFill>
+                  <a:srgbClr val="FFFFFF"/>
+                </a:solidFill>
+                <a:latin typeface="Malgun Gothic" pitchFamily="34" charset="0"/>
+                <a:ea typeface="Malgun Gothic" pitchFamily="34" charset="-122"/>
+                <a:cs typeface="Malgun Gothic" pitchFamily="34" charset="-120"/>
+              </a:defRPr>
+            </a:lvl1pPr>
+          </a:lstStyle>
+          <a:p>
+            <a:r>
+              <a:rPr lang="en-US" altLang="ko-KR"/>
+              <a:t>https://github.com/stulss/plan-do-see-diary/commits/61789c1819698c2ab946de2f702113b6438c5121/</a:t>
+            </a:r>
+            <a:endParaRPr lang="ko-KR" altLang="en-US" dirty="0"/>
           </a:p>
         </p:txBody>
       </p:sp>
@@ -30321,30 +32701,6 @@
           </a:ln>
         </p:spPr>
       </p:sp>
-      <p:pic>
-        <p:nvPicPr>
-          <p:cNvPr id="7" name="Image 0" descr="C:\Users\stuls\Desktop\Agent\plan-do-see-diary\reports\assets\06_C34-C35_C78-C82_planner_public_notice.png"/>
-          <p:cNvPicPr>
-            <a:picLocks noChangeAspect="1"/>
-          </p:cNvPicPr>
-          <p:nvPr/>
-        </p:nvPicPr>
-        <p:blipFill>
-          <a:blip r:embed="rId3"/>
-          <a:stretch>
-            <a:fillRect/>
-          </a:stretch>
-        </p:blipFill>
-        <p:spPr>
-          <a:xfrm>
-            <a:off x="1654446" y="1792224"/>
-            <a:ext cx="1592292" cy="4050792"/>
-          </a:xfrm>
-          <a:prstGeom prst="rect">
-            <a:avLst/>
-          </a:prstGeom>
-        </p:spPr>
-      </p:pic>
       <p:sp>
         <p:nvSpPr>
           <p:cNvPr id="8" name="Text 5"/>
@@ -31112,6 +33468,36 @@
           </a:p>
         </p:txBody>
       </p:sp>
+      <p:pic>
+        <p:nvPicPr>
+          <p:cNvPr id="30" name="그림 29">
+            <a:extLst>
+              <a:ext uri="{FF2B5EF4-FFF2-40B4-BE49-F238E27FC236}">
+                <a16:creationId xmlns:a16="http://schemas.microsoft.com/office/drawing/2014/main" id="{159BFCAC-6D63-4545-9332-8455B1A827AB}"/>
+              </a:ext>
+            </a:extLst>
+          </p:cNvPr>
+          <p:cNvPicPr>
+            <a:picLocks/>
+          </p:cNvPicPr>
+          <p:nvPr/>
+        </p:nvPicPr>
+        <p:blipFill>
+          <a:blip r:embed="rId3"/>
+          <a:stretch>
+            <a:fillRect/>
+          </a:stretch>
+        </p:blipFill>
+        <p:spPr>
+          <a:xfrm>
+            <a:off x="694944" y="2711700"/>
+            <a:ext cx="3511296" cy="2211840"/>
+          </a:xfrm>
+          <a:prstGeom prst="rect">
+            <a:avLst/>
+          </a:prstGeom>
+        </p:spPr>
+      </p:pic>
     </p:spTree>
   </p:cSld>
   <p:clrMapOvr>
@@ -31336,30 +33722,6 @@
           </a:ln>
         </p:spPr>
       </p:sp>
-      <p:pic>
-        <p:nvPicPr>
-          <p:cNvPr id="7" name="Image 0" descr="C:\Users\stuls\Desktop\Agent\plan-do-see-diary\reports\assets\01_C04-C08_plan_revision.png"/>
-          <p:cNvPicPr>
-            <a:picLocks noChangeAspect="1"/>
-          </p:cNvPicPr>
-          <p:nvPr/>
-        </p:nvPicPr>
-        <p:blipFill>
-          <a:blip r:embed="rId3"/>
-          <a:stretch>
-            <a:fillRect/>
-          </a:stretch>
-        </p:blipFill>
-        <p:spPr>
-          <a:xfrm>
-            <a:off x="1498998" y="1773936"/>
-            <a:ext cx="1592292" cy="4050792"/>
-          </a:xfrm>
-          <a:prstGeom prst="rect">
-            <a:avLst/>
-          </a:prstGeom>
-        </p:spPr>
-      </p:pic>
       <p:sp>
         <p:nvSpPr>
           <p:cNvPr id="8" name="Text 5"/>
@@ -31428,30 +33790,6 @@
           </a:ln>
         </p:spPr>
       </p:sp>
-      <p:pic>
-        <p:nvPicPr>
-          <p:cNvPr id="10" name="Image 1" descr="C:\Users\stuls\Desktop\Agent\plan-do-see-diary\reports\assets\02_C09-C22_tasks_completion_sort.png"/>
-          <p:cNvPicPr>
-            <a:picLocks noChangeAspect="1"/>
-          </p:cNvPicPr>
-          <p:nvPr/>
-        </p:nvPicPr>
-        <p:blipFill>
-          <a:blip r:embed="rId4"/>
-          <a:stretch>
-            <a:fillRect/>
-          </a:stretch>
-        </p:blipFill>
-        <p:spPr>
-          <a:xfrm>
-            <a:off x="5293758" y="1773936"/>
-            <a:ext cx="1592292" cy="4050792"/>
-          </a:xfrm>
-          <a:prstGeom prst="rect">
-            <a:avLst/>
-          </a:prstGeom>
-        </p:spPr>
-      </p:pic>
       <p:sp>
         <p:nvSpPr>
           <p:cNvPr id="11" name="Text 7"/>
@@ -31520,11 +33858,223 @@
           </a:ln>
         </p:spPr>
       </p:sp>
+      <p:sp>
+        <p:nvSpPr>
+          <p:cNvPr id="14" name="Text 9"/>
+          <p:cNvSpPr/>
+          <p:nvPr/>
+        </p:nvSpPr>
+        <p:spPr>
+          <a:xfrm>
+            <a:off x="8183880" y="5897880"/>
+            <a:ext cx="3401568" cy="201168"/>
+          </a:xfrm>
+          <a:prstGeom prst="rect">
+            <a:avLst/>
+          </a:prstGeom>
+          <a:noFill/>
+          <a:ln/>
+        </p:spPr>
+        <p:txBody>
+          <a:bodyPr wrap="square" lIns="0" tIns="0" rIns="0" bIns="0" rtlCol="0" anchor="ctr">
+            <a:normAutofit/>
+          </a:bodyPr>
+          <a:lstStyle/>
+          <a:p>
+            <a:pPr marL="0" indent="0" algn="ctr">
+              <a:buNone/>
+            </a:pPr>
+            <a:r>
+              <a:rPr lang="en-US" sz="950" b="1" dirty="0">
+                <a:solidFill>
+                  <a:srgbClr val="146B58"/>
+                </a:solidFill>
+                <a:latin typeface="Malgun Gothic" pitchFamily="34" charset="0"/>
+                <a:ea typeface="Malgun Gothic" pitchFamily="34" charset="-122"/>
+                <a:cs typeface="Malgun Gothic" pitchFamily="34" charset="-120"/>
+              </a:rPr>
+              <a:t>C23~C27  실제 실행 기록</a:t>
+            </a:r>
+            <a:endParaRPr lang="en-US" sz="950" dirty="0"/>
+          </a:p>
+        </p:txBody>
+      </p:sp>
+      <p:sp>
+        <p:nvSpPr>
+          <p:cNvPr id="15" name="Shape 10"/>
+          <p:cNvSpPr/>
+          <p:nvPr/>
+        </p:nvSpPr>
+        <p:spPr>
+          <a:xfrm>
+            <a:off x="566928" y="6547104"/>
+            <a:ext cx="11018520" cy="0"/>
+          </a:xfrm>
+          <a:prstGeom prst="line">
+            <a:avLst/>
+          </a:prstGeom>
+          <a:noFill/>
+          <a:ln w="12700">
+            <a:solidFill>
+              <a:srgbClr val="D8E2DD"/>
+            </a:solidFill>
+            <a:prstDash val="solid"/>
+          </a:ln>
+        </p:spPr>
+      </p:sp>
+      <p:sp>
+        <p:nvSpPr>
+          <p:cNvPr id="16" name="Text 11"/>
+          <p:cNvSpPr/>
+          <p:nvPr/>
+        </p:nvSpPr>
+        <p:spPr>
+          <a:xfrm>
+            <a:off x="566928" y="6583680"/>
+            <a:ext cx="2011680" cy="164592"/>
+          </a:xfrm>
+          <a:prstGeom prst="rect">
+            <a:avLst/>
+          </a:prstGeom>
+          <a:noFill/>
+          <a:ln/>
+        </p:spPr>
+        <p:txBody>
+          <a:bodyPr wrap="square" lIns="0" tIns="0" rIns="0" bIns="0" rtlCol="0" anchor="ctr">
+            <a:normAutofit/>
+          </a:bodyPr>
+          <a:lstStyle/>
+          <a:p>
+            <a:pPr marL="0" indent="0">
+              <a:buNone/>
+            </a:pPr>
+            <a:r>
+              <a:rPr lang="en-US" sz="850" b="1" kern="0" spc="180" dirty="0">
+                <a:solidFill>
+                  <a:srgbClr val="146B58"/>
+                </a:solidFill>
+                <a:latin typeface="Malgun Gothic" pitchFamily="34" charset="0"/>
+                <a:ea typeface="Malgun Gothic" pitchFamily="34" charset="-122"/>
+                <a:cs typeface="Malgun Gothic" pitchFamily="34" charset="-120"/>
+              </a:rPr>
+              <a:t>PLAN · DO · SEE</a:t>
+            </a:r>
+            <a:endParaRPr lang="en-US" sz="850" dirty="0"/>
+          </a:p>
+        </p:txBody>
+      </p:sp>
+      <p:sp>
+        <p:nvSpPr>
+          <p:cNvPr id="17" name="Text 12"/>
+          <p:cNvSpPr/>
+          <p:nvPr/>
+        </p:nvSpPr>
+        <p:spPr>
+          <a:xfrm>
+            <a:off x="9875520" y="6583680"/>
+            <a:ext cx="1700784" cy="164592"/>
+          </a:xfrm>
+          <a:prstGeom prst="rect">
+            <a:avLst/>
+          </a:prstGeom>
+          <a:noFill/>
+          <a:ln/>
+        </p:spPr>
+        <p:txBody>
+          <a:bodyPr wrap="square" lIns="0" tIns="0" rIns="0" bIns="0" rtlCol="0" anchor="ctr">
+            <a:normAutofit/>
+          </a:bodyPr>
+          <a:lstStyle/>
+          <a:p>
+            <a:pPr marL="0" indent="0" algn="r">
+              <a:buNone/>
+            </a:pPr>
+            <a:r>
+              <a:rPr lang="en-US" sz="850" dirty="0">
+                <a:solidFill>
+                  <a:srgbClr val="5F6F69"/>
+                </a:solidFill>
+                <a:latin typeface="Malgun Gothic" pitchFamily="34" charset="0"/>
+                <a:ea typeface="Malgun Gothic" pitchFamily="34" charset="-122"/>
+                <a:cs typeface="Malgun Gothic" pitchFamily="34" charset="-120"/>
+              </a:rPr>
+              <a:t>2026.09.01</a:t>
+            </a:r>
+            <a:endParaRPr lang="en-US" sz="850" dirty="0"/>
+          </a:p>
+        </p:txBody>
+      </p:sp>
       <p:pic>
         <p:nvPicPr>
-          <p:cNvPr id="13" name="Image 2" descr="C:\Users\stuls\Desktop\Agent\plan-do-see-diary\reports\assets\03_C23-C27_run_log.png"/>
+          <p:cNvPr id="10" name="그림 9">
+            <a:extLst>
+              <a:ext uri="{FF2B5EF4-FFF2-40B4-BE49-F238E27FC236}">
+                <a16:creationId xmlns:a16="http://schemas.microsoft.com/office/drawing/2014/main" id="{F72D5548-4A31-4620-ADDB-FB8001AF82CD}"/>
+              </a:ext>
+            </a:extLst>
+          </p:cNvPr>
           <p:cNvPicPr>
-            <a:picLocks noChangeAspect="1"/>
+            <a:picLocks/>
+          </p:cNvPicPr>
+          <p:nvPr/>
+        </p:nvPicPr>
+        <p:blipFill>
+          <a:blip r:embed="rId3"/>
+          <a:stretch>
+            <a:fillRect/>
+          </a:stretch>
+        </p:blipFill>
+        <p:spPr>
+          <a:xfrm>
+            <a:off x="576072" y="2832354"/>
+            <a:ext cx="3438144" cy="1933956"/>
+          </a:xfrm>
+          <a:prstGeom prst="rect">
+            <a:avLst/>
+          </a:prstGeom>
+        </p:spPr>
+      </p:pic>
+      <p:pic>
+        <p:nvPicPr>
+          <p:cNvPr id="20" name="그림 19">
+            <a:extLst>
+              <a:ext uri="{FF2B5EF4-FFF2-40B4-BE49-F238E27FC236}">
+                <a16:creationId xmlns:a16="http://schemas.microsoft.com/office/drawing/2014/main" id="{4275882A-5956-4D12-9C26-D6841AD73D9F}"/>
+              </a:ext>
+            </a:extLst>
+          </p:cNvPr>
+          <p:cNvPicPr>
+            <a:picLocks/>
+          </p:cNvPicPr>
+          <p:nvPr/>
+        </p:nvPicPr>
+        <p:blipFill>
+          <a:blip r:embed="rId4"/>
+          <a:stretch>
+            <a:fillRect/>
+          </a:stretch>
+        </p:blipFill>
+        <p:spPr>
+          <a:xfrm>
+            <a:off x="4370832" y="2764279"/>
+            <a:ext cx="3438144" cy="2070106"/>
+          </a:xfrm>
+          <a:prstGeom prst="rect">
+            <a:avLst/>
+          </a:prstGeom>
+        </p:spPr>
+      </p:pic>
+      <p:pic>
+        <p:nvPicPr>
+          <p:cNvPr id="23" name="그림 22">
+            <a:extLst>
+              <a:ext uri="{FF2B5EF4-FFF2-40B4-BE49-F238E27FC236}">
+                <a16:creationId xmlns:a16="http://schemas.microsoft.com/office/drawing/2014/main" id="{E81BEB6F-B0DE-48CC-9B6C-03AB27991684}"/>
+              </a:ext>
+            </a:extLst>
+          </p:cNvPr>
+          <p:cNvPicPr>
+            <a:picLocks/>
           </p:cNvPicPr>
           <p:nvPr/>
         </p:nvPicPr>
@@ -31536,160 +34086,14 @@
         </p:blipFill>
         <p:spPr>
           <a:xfrm>
-            <a:off x="9088518" y="1773936"/>
-            <a:ext cx="1592292" cy="4050792"/>
+            <a:off x="8165592" y="2670430"/>
+            <a:ext cx="3438144" cy="2257805"/>
           </a:xfrm>
           <a:prstGeom prst="rect">
             <a:avLst/>
           </a:prstGeom>
         </p:spPr>
       </p:pic>
-      <p:sp>
-        <p:nvSpPr>
-          <p:cNvPr id="14" name="Text 9"/>
-          <p:cNvSpPr/>
-          <p:nvPr/>
-        </p:nvSpPr>
-        <p:spPr>
-          <a:xfrm>
-            <a:off x="8183880" y="5897880"/>
-            <a:ext cx="3401568" cy="201168"/>
-          </a:xfrm>
-          <a:prstGeom prst="rect">
-            <a:avLst/>
-          </a:prstGeom>
-          <a:noFill/>
-          <a:ln/>
-        </p:spPr>
-        <p:txBody>
-          <a:bodyPr wrap="square" lIns="0" tIns="0" rIns="0" bIns="0" rtlCol="0" anchor="ctr">
-            <a:normAutofit/>
-          </a:bodyPr>
-          <a:lstStyle/>
-          <a:p>
-            <a:pPr marL="0" indent="0" algn="ctr">
-              <a:buNone/>
-            </a:pPr>
-            <a:r>
-              <a:rPr lang="en-US" sz="950" b="1" dirty="0">
-                <a:solidFill>
-                  <a:srgbClr val="146B58"/>
-                </a:solidFill>
-                <a:latin typeface="Malgun Gothic" pitchFamily="34" charset="0"/>
-                <a:ea typeface="Malgun Gothic" pitchFamily="34" charset="-122"/>
-                <a:cs typeface="Malgun Gothic" pitchFamily="34" charset="-120"/>
-              </a:rPr>
-              <a:t>C23~C27  실제 실행 기록</a:t>
-            </a:r>
-            <a:endParaRPr lang="en-US" sz="950" dirty="0"/>
-          </a:p>
-        </p:txBody>
-      </p:sp>
-      <p:sp>
-        <p:nvSpPr>
-          <p:cNvPr id="15" name="Shape 10"/>
-          <p:cNvSpPr/>
-          <p:nvPr/>
-        </p:nvSpPr>
-        <p:spPr>
-          <a:xfrm>
-            <a:off x="566928" y="6547104"/>
-            <a:ext cx="11018520" cy="0"/>
-          </a:xfrm>
-          <a:prstGeom prst="line">
-            <a:avLst/>
-          </a:prstGeom>
-          <a:noFill/>
-          <a:ln w="12700">
-            <a:solidFill>
-              <a:srgbClr val="D8E2DD"/>
-            </a:solidFill>
-            <a:prstDash val="solid"/>
-          </a:ln>
-        </p:spPr>
-      </p:sp>
-      <p:sp>
-        <p:nvSpPr>
-          <p:cNvPr id="16" name="Text 11"/>
-          <p:cNvSpPr/>
-          <p:nvPr/>
-        </p:nvSpPr>
-        <p:spPr>
-          <a:xfrm>
-            <a:off x="566928" y="6583680"/>
-            <a:ext cx="2011680" cy="164592"/>
-          </a:xfrm>
-          <a:prstGeom prst="rect">
-            <a:avLst/>
-          </a:prstGeom>
-          <a:noFill/>
-          <a:ln/>
-        </p:spPr>
-        <p:txBody>
-          <a:bodyPr wrap="square" lIns="0" tIns="0" rIns="0" bIns="0" rtlCol="0" anchor="ctr">
-            <a:normAutofit/>
-          </a:bodyPr>
-          <a:lstStyle/>
-          <a:p>
-            <a:pPr marL="0" indent="0">
-              <a:buNone/>
-            </a:pPr>
-            <a:r>
-              <a:rPr lang="en-US" sz="850" b="1" kern="0" spc="180" dirty="0">
-                <a:solidFill>
-                  <a:srgbClr val="146B58"/>
-                </a:solidFill>
-                <a:latin typeface="Malgun Gothic" pitchFamily="34" charset="0"/>
-                <a:ea typeface="Malgun Gothic" pitchFamily="34" charset="-122"/>
-                <a:cs typeface="Malgun Gothic" pitchFamily="34" charset="-120"/>
-              </a:rPr>
-              <a:t>PLAN · DO · SEE</a:t>
-            </a:r>
-            <a:endParaRPr lang="en-US" sz="850" dirty="0"/>
-          </a:p>
-        </p:txBody>
-      </p:sp>
-      <p:sp>
-        <p:nvSpPr>
-          <p:cNvPr id="17" name="Text 12"/>
-          <p:cNvSpPr/>
-          <p:nvPr/>
-        </p:nvSpPr>
-        <p:spPr>
-          <a:xfrm>
-            <a:off x="9875520" y="6583680"/>
-            <a:ext cx="1700784" cy="164592"/>
-          </a:xfrm>
-          <a:prstGeom prst="rect">
-            <a:avLst/>
-          </a:prstGeom>
-          <a:noFill/>
-          <a:ln/>
-        </p:spPr>
-        <p:txBody>
-          <a:bodyPr wrap="square" lIns="0" tIns="0" rIns="0" bIns="0" rtlCol="0" anchor="ctr">
-            <a:normAutofit/>
-          </a:bodyPr>
-          <a:lstStyle/>
-          <a:p>
-            <a:pPr marL="0" indent="0" algn="r">
-              <a:buNone/>
-            </a:pPr>
-            <a:r>
-              <a:rPr lang="en-US" sz="850" dirty="0">
-                <a:solidFill>
-                  <a:srgbClr val="5F6F69"/>
-                </a:solidFill>
-                <a:latin typeface="Malgun Gothic" pitchFamily="34" charset="0"/>
-                <a:ea typeface="Malgun Gothic" pitchFamily="34" charset="-122"/>
-                <a:cs typeface="Malgun Gothic" pitchFamily="34" charset="-120"/>
-              </a:rPr>
-              <a:t>2026.09.01</a:t>
-            </a:r>
-            <a:endParaRPr lang="en-US" sz="850" dirty="0"/>
-          </a:p>
-        </p:txBody>
-      </p:sp>
     </p:spTree>
   </p:cSld>
   <p:clrMapOvr>
@@ -31914,30 +34318,6 @@
           </a:ln>
         </p:spPr>
       </p:sp>
-      <p:pic>
-        <p:nvPicPr>
-          <p:cNvPr id="7" name="Image 0" descr="C:\Users\stuls\Desktop\Agent\plan-do-see-diary\reports\assets\04_C28-C33_C83_review_metrics.png"/>
-          <p:cNvPicPr>
-            <a:picLocks noChangeAspect="1"/>
-          </p:cNvPicPr>
-          <p:nvPr/>
-        </p:nvPicPr>
-        <p:blipFill>
-          <a:blip r:embed="rId3"/>
-          <a:stretch>
-            <a:fillRect/>
-          </a:stretch>
-        </p:blipFill>
-        <p:spPr>
-          <a:xfrm>
-            <a:off x="1677306" y="1792224"/>
-            <a:ext cx="1592292" cy="4050792"/>
-          </a:xfrm>
-          <a:prstGeom prst="rect">
-            <a:avLst/>
-          </a:prstGeom>
-        </p:spPr>
-      </p:pic>
       <p:sp>
         <p:nvSpPr>
           <p:cNvPr id="8" name="Text 5"/>
@@ -32006,30 +34386,6 @@
           </a:ln>
         </p:spPr>
       </p:sp>
-      <p:pic>
-        <p:nvPicPr>
-          <p:cNvPr id="10" name="Image 1" descr="C:\Users\stuls\Desktop\Agent\plan-do-see-diary\reports\assets\05_C83_metric_evidence_list.png"/>
-          <p:cNvPicPr>
-            <a:picLocks noChangeAspect="1"/>
-          </p:cNvPicPr>
-          <p:nvPr/>
-        </p:nvPicPr>
-        <p:blipFill>
-          <a:blip r:embed="rId4"/>
-          <a:stretch>
-            <a:fillRect/>
-          </a:stretch>
-        </p:blipFill>
-        <p:spPr>
-          <a:xfrm>
-            <a:off x="5581794" y="1792224"/>
-            <a:ext cx="1592292" cy="4050792"/>
-          </a:xfrm>
-          <a:prstGeom prst="rect">
-            <a:avLst/>
-          </a:prstGeom>
-        </p:spPr>
-      </p:pic>
       <p:sp>
         <p:nvSpPr>
           <p:cNvPr id="11" name="Text 7"/>
@@ -32897,6 +35253,66 @@
           </a:p>
         </p:txBody>
       </p:sp>
+      <p:pic>
+        <p:nvPicPr>
+          <p:cNvPr id="10" name="그림 9">
+            <a:extLst>
+              <a:ext uri="{FF2B5EF4-FFF2-40B4-BE49-F238E27FC236}">
+                <a16:creationId xmlns:a16="http://schemas.microsoft.com/office/drawing/2014/main" id="{2D7AE577-8C18-4848-A941-606806092CF7}"/>
+              </a:ext>
+            </a:extLst>
+          </p:cNvPr>
+          <p:cNvPicPr>
+            <a:picLocks/>
+          </p:cNvPicPr>
+          <p:nvPr/>
+        </p:nvPicPr>
+        <p:blipFill>
+          <a:blip r:embed="rId3"/>
+          <a:stretch>
+            <a:fillRect/>
+          </a:stretch>
+        </p:blipFill>
+        <p:spPr>
+          <a:xfrm>
+            <a:off x="694944" y="2817209"/>
+            <a:ext cx="3557016" cy="2000821"/>
+          </a:xfrm>
+          <a:prstGeom prst="rect">
+            <a:avLst/>
+          </a:prstGeom>
+        </p:spPr>
+      </p:pic>
+      <p:pic>
+        <p:nvPicPr>
+          <p:cNvPr id="36" name="그림 35">
+            <a:extLst>
+              <a:ext uri="{FF2B5EF4-FFF2-40B4-BE49-F238E27FC236}">
+                <a16:creationId xmlns:a16="http://schemas.microsoft.com/office/drawing/2014/main" id="{4A2C0FD1-7F2A-4191-9C90-A194E5262F73}"/>
+              </a:ext>
+            </a:extLst>
+          </p:cNvPr>
+          <p:cNvPicPr>
+            <a:picLocks/>
+          </p:cNvPicPr>
+          <p:nvPr/>
+        </p:nvPicPr>
+        <p:blipFill>
+          <a:blip r:embed="rId4"/>
+          <a:stretch>
+            <a:fillRect/>
+          </a:stretch>
+        </p:blipFill>
+        <p:spPr>
+          <a:xfrm>
+            <a:off x="4599432" y="2817209"/>
+            <a:ext cx="3557016" cy="2000821"/>
+          </a:xfrm>
+          <a:prstGeom prst="rect">
+            <a:avLst/>
+          </a:prstGeom>
+        </p:spPr>
+      </p:pic>
     </p:spTree>
   </p:cSld>
   <p:clrMapOvr>
@@ -34365,30 +36781,6 @@
           </a:ln>
         </p:spPr>
       </p:sp>
-      <p:pic>
-        <p:nvPicPr>
-          <p:cNvPr id="7" name="Image 0" descr="C:\Users\stuls\Desktop\Agent\plan-do-see-diary\reports\assets\07_C57_script_text_safe.png"/>
-          <p:cNvPicPr>
-            <a:picLocks noChangeAspect="1"/>
-          </p:cNvPicPr>
-          <p:nvPr/>
-        </p:nvPicPr>
-        <p:blipFill>
-          <a:blip r:embed="rId3"/>
-          <a:stretch>
-            <a:fillRect/>
-          </a:stretch>
-        </p:blipFill>
-        <p:spPr>
-          <a:xfrm>
-            <a:off x="1644985" y="1810512"/>
-            <a:ext cx="1556349" cy="3959352"/>
-          </a:xfrm>
-          <a:prstGeom prst="rect">
-            <a:avLst/>
-          </a:prstGeom>
-        </p:spPr>
-      </p:pic>
       <p:sp>
         <p:nvSpPr>
           <p:cNvPr id="8" name="Text 5"/>
@@ -35534,6 +37926,36 @@
           </a:p>
         </p:txBody>
       </p:sp>
+      <p:pic>
+        <p:nvPicPr>
+          <p:cNvPr id="40" name="그림 39">
+            <a:extLst>
+              <a:ext uri="{FF2B5EF4-FFF2-40B4-BE49-F238E27FC236}">
+                <a16:creationId xmlns:a16="http://schemas.microsoft.com/office/drawing/2014/main" id="{3C1BC4AA-B019-441F-B53E-F5CFB0808009}"/>
+              </a:ext>
+            </a:extLst>
+          </p:cNvPr>
+          <p:cNvPicPr>
+            <a:picLocks/>
+          </p:cNvPicPr>
+          <p:nvPr/>
+        </p:nvPicPr>
+        <p:blipFill>
+          <a:blip r:embed="rId3"/>
+          <a:stretch>
+            <a:fillRect/>
+          </a:stretch>
+        </p:blipFill>
+        <p:spPr>
+          <a:xfrm>
+            <a:off x="713232" y="2617922"/>
+            <a:ext cx="3419856" cy="2344531"/>
+          </a:xfrm>
+          <a:prstGeom prst="rect">
+            <a:avLst/>
+          </a:prstGeom>
+        </p:spPr>
+      </p:pic>
     </p:spTree>
   </p:cSld>
   <p:clrMapOvr>

--- a/reports/플랜두씨_다이어리_과제6_제출보고서.pptx
+++ b/reports/플랜두씨_다이어리_과제6_제출보고서.pptx
@@ -2492,7 +2492,7 @@
           <a:p>
             <a:r>
               <a:rPr lang="en-US" altLang="ko-KR"/>
-              <a:t>https://github.com/stulss/plan-do-see-diary/commits/61789c1819698c2ab946de2f702113b6438c5121/</a:t>
+              <a:t>https://github.com/stulss/plan-do-see-diary/commits/eb390d565a015e390362b07d2e8dd51b390e8eb2/</a:t>
             </a:r>
             <a:endParaRPr lang="ko-KR" altLang="en-US" dirty="0"/>
           </a:p>
@@ -30994,7 +30994,7 @@
           <a:p>
             <a:r>
               <a:rPr lang="en-US" altLang="ko-KR"/>
-              <a:t>https://github.com/stulss/plan-do-see-diary/commits/61789c1819698c2ab946de2f702113b6438c5121/</a:t>
+              <a:t>https://github.com/stulss/plan-do-see-diary/commits/eb390d565a015e390362b07d2e8dd51b390e8eb2/</a:t>
             </a:r>
             <a:endParaRPr lang="ko-KR" altLang="en-US" dirty="0"/>
           </a:p>

--- a/reports/플랜두씨_다이어리_과제6_제출보고서.pptx
+++ b/reports/플랜두씨_다이어리_과제6_제출보고서.pptx
@@ -2491,10 +2491,20 @@
           </a:lstStyle>
           <a:p>
             <a:r>
-              <a:rPr lang="en-US" altLang="ko-KR"/>
-              <a:t>https://github.com/stulss/plan-do-see-diary/commits/eb390d565a015e390362b07d2e8dd51b390e8eb2/</a:t>
-            </a:r>
-            <a:endParaRPr lang="ko-KR" altLang="en-US" dirty="0"/>
+              <a:rPr lang="en-US" altLang="ko-KR" i="0" dirty="0">
+                <a:solidFill>
+                  <a:schemeClr val="bg1"/>
+                </a:solidFill>
+                <a:effectLst/>
+                <a:latin typeface="ui-monospace"/>
+              </a:rPr>
+              <a:t>https://github.com/stulss/plan-do-see-diary/commits/356a46034e94084caec3e17eaaf2ab8d98cef7ce/</a:t>
+            </a:r>
+            <a:endParaRPr lang="ko-KR" altLang="en-US" dirty="0">
+              <a:solidFill>
+                <a:schemeClr val="bg1"/>
+              </a:solidFill>
+            </a:endParaRPr>
           </a:p>
         </p:txBody>
       </p:sp>
@@ -30993,10 +31003,20 @@
           </a:lstStyle>
           <a:p>
             <a:r>
-              <a:rPr lang="en-US" altLang="ko-KR"/>
-              <a:t>https://github.com/stulss/plan-do-see-diary/commits/eb390d565a015e390362b07d2e8dd51b390e8eb2/</a:t>
-            </a:r>
-            <a:endParaRPr lang="ko-KR" altLang="en-US" dirty="0"/>
+              <a:rPr lang="en-US" altLang="ko-KR" sz="1600" i="0" dirty="0">
+                <a:solidFill>
+                  <a:schemeClr val="bg1"/>
+                </a:solidFill>
+                <a:effectLst/>
+                <a:latin typeface="ui-monospace"/>
+              </a:rPr>
+              <a:t>https://github.com/stulss/plan-do-see-diary/commits/356a46034e94084caec3e17eaaf2ab8d98cef7ce/</a:t>
+            </a:r>
+            <a:endParaRPr lang="ko-KR" altLang="en-US" sz="1600" dirty="0">
+              <a:solidFill>
+                <a:schemeClr val="bg1"/>
+              </a:solidFill>
+            </a:endParaRPr>
           </a:p>
         </p:txBody>
       </p:sp>
